--- a/Java_Masterclass_Deck.pptx
+++ b/Java_Masterclass_Deck.pptx
@@ -4,21 +4,24 @@
   <p:sldMasterIdLst>
     <p:sldMasterId id="2147483648" r:id="rId1"/>
   </p:sldMasterIdLst>
+  <p:notesMasterIdLst>
+    <p:notesMasterId r:id="rId14"/>
+  </p:notesMasterIdLst>
   <p:sldIdLst>
-    <p:sldId id="256" r:id="rId7"/>
-    <p:sldId id="257" r:id="rId8"/>
-    <p:sldId id="258" r:id="rId9"/>
-    <p:sldId id="259" r:id="rId10"/>
-    <p:sldId id="260" r:id="rId11"/>
-    <p:sldId id="261" r:id="rId12"/>
-    <p:sldId id="262" r:id="rId13"/>
-    <p:sldId id="263" r:id="rId14"/>
-    <p:sldId id="264" r:id="rId15"/>
-    <p:sldId id="265" r:id="rId16"/>
-    <p:sldId id="266" r:id="rId17"/>
-    <p:sldId id="267" r:id="rId18"/>
+    <p:sldId id="256" r:id="rId2"/>
+    <p:sldId id="257" r:id="rId3"/>
+    <p:sldId id="258" r:id="rId4"/>
+    <p:sldId id="259" r:id="rId5"/>
+    <p:sldId id="260" r:id="rId6"/>
+    <p:sldId id="261" r:id="rId7"/>
+    <p:sldId id="262" r:id="rId8"/>
+    <p:sldId id="263" r:id="rId9"/>
+    <p:sldId id="264" r:id="rId10"/>
+    <p:sldId id="265" r:id="rId11"/>
+    <p:sldId id="266" r:id="rId12"/>
+    <p:sldId id="267" r:id="rId13"/>
   </p:sldIdLst>
-  <p:sldSz cx="12191695" cy="6858000" type="screen4x3"/>
+  <p:sldSz cx="12192000" cy="6858000"/>
   <p:notesSz cx="6858000" cy="9144000"/>
   <p:defaultTextStyle>
     <a:defPPr>
@@ -115,7 +118,461 @@
       </a:defRPr>
     </a:lvl9pPr>
   </p:defaultTextStyle>
+  <p:extLst>
+    <p:ext uri="{EFAFB233-063F-42B5-8137-9DF3F51BA10A}">
+      <p15:sldGuideLst xmlns:p15="http://schemas.microsoft.com/office/powerpoint/2012/main">
+        <p15:guide id="1" orient="horz" pos="2160">
+          <p15:clr>
+            <a:srgbClr val="A4A3A4"/>
+          </p15:clr>
+        </p15:guide>
+        <p15:guide id="2" pos="2880">
+          <p15:clr>
+            <a:srgbClr val="A4A3A4"/>
+          </p15:clr>
+        </p15:guide>
+      </p15:sldGuideLst>
+    </p:ext>
+  </p:extLst>
 </p:presentation>
+</file>
+
+<file path=ppt/notesMasters/notesMaster1.xml><?xml version="1.0" encoding="utf-8"?>
+<p:notesMaster xmlns:a="http://schemas.openxmlformats.org/drawingml/2006/main" xmlns:r="http://schemas.openxmlformats.org/officeDocument/2006/relationships" xmlns:p="http://schemas.openxmlformats.org/presentationml/2006/main">
+  <p:cSld>
+    <p:bg>
+      <p:bgRef idx="1001">
+        <a:schemeClr val="bg1"/>
+      </p:bgRef>
+    </p:bg>
+    <p:spTree>
+      <p:nvGrpSpPr>
+        <p:cNvPr id="1" name=""/>
+        <p:cNvGrpSpPr/>
+        <p:nvPr/>
+      </p:nvGrpSpPr>
+      <p:grpSpPr>
+        <a:xfrm>
+          <a:off x="0" y="0"/>
+          <a:ext cx="0" cy="0"/>
+          <a:chOff x="0" y="0"/>
+          <a:chExt cx="0" cy="0"/>
+        </a:xfrm>
+      </p:grpSpPr>
+      <p:sp>
+        <p:nvSpPr>
+          <p:cNvPr id="2" name="Header Placeholder 1"/>
+          <p:cNvSpPr>
+            <a:spLocks noGrp="1"/>
+          </p:cNvSpPr>
+          <p:nvPr>
+            <p:ph type="hdr" sz="quarter"/>
+          </p:nvPr>
+        </p:nvSpPr>
+        <p:spPr>
+          <a:xfrm>
+            <a:off x="0" y="0"/>
+            <a:ext cx="2971800" cy="458788"/>
+          </a:xfrm>
+          <a:prstGeom prst="rect">
+            <a:avLst/>
+          </a:prstGeom>
+        </p:spPr>
+        <p:txBody>
+          <a:bodyPr vert="horz" lIns="91440" tIns="45720" rIns="91440" bIns="45720" rtlCol="0"/>
+          <a:lstStyle>
+            <a:lvl1pPr algn="l">
+              <a:defRPr sz="1200"/>
+            </a:lvl1pPr>
+          </a:lstStyle>
+          <a:p>
+            <a:endParaRPr lang="en-US"/>
+          </a:p>
+        </p:txBody>
+      </p:sp>
+      <p:sp>
+        <p:nvSpPr>
+          <p:cNvPr id="3" name="Date Placeholder 2"/>
+          <p:cNvSpPr>
+            <a:spLocks noGrp="1"/>
+          </p:cNvSpPr>
+          <p:nvPr>
+            <p:ph type="dt" idx="1"/>
+          </p:nvPr>
+        </p:nvSpPr>
+        <p:spPr>
+          <a:xfrm>
+            <a:off x="3884613" y="0"/>
+            <a:ext cx="2971800" cy="458788"/>
+          </a:xfrm>
+          <a:prstGeom prst="rect">
+            <a:avLst/>
+          </a:prstGeom>
+        </p:spPr>
+        <p:txBody>
+          <a:bodyPr vert="horz" lIns="91440" tIns="45720" rIns="91440" bIns="45720" rtlCol="0"/>
+          <a:lstStyle>
+            <a:lvl1pPr algn="r">
+              <a:defRPr sz="1200"/>
+            </a:lvl1pPr>
+          </a:lstStyle>
+          <a:p>
+            <a:fld id="{39FF1CC0-B22D-F24F-8715-3103263488C0}" type="datetimeFigureOut">
+              <a:rPr lang="en-US" smtClean="0"/>
+              <a:t>10/23/26</a:t>
+            </a:fld>
+            <a:endParaRPr lang="en-US"/>
+          </a:p>
+        </p:txBody>
+      </p:sp>
+      <p:sp>
+        <p:nvSpPr>
+          <p:cNvPr id="4" name="Slide Image Placeholder 3"/>
+          <p:cNvSpPr>
+            <a:spLocks noGrp="1" noRot="1" noChangeAspect="1"/>
+          </p:cNvSpPr>
+          <p:nvPr>
+            <p:ph type="sldImg" idx="2"/>
+          </p:nvPr>
+        </p:nvSpPr>
+        <p:spPr>
+          <a:xfrm>
+            <a:off x="685800" y="1143000"/>
+            <a:ext cx="5486400" cy="3086100"/>
+          </a:xfrm>
+          <a:prstGeom prst="rect">
+            <a:avLst/>
+          </a:prstGeom>
+          <a:noFill/>
+          <a:ln w="12700">
+            <a:solidFill>
+              <a:prstClr val="black"/>
+            </a:solidFill>
+          </a:ln>
+        </p:spPr>
+        <p:txBody>
+          <a:bodyPr vert="horz" lIns="91440" tIns="45720" rIns="91440" bIns="45720" rtlCol="0" anchor="ctr"/>
+          <a:lstStyle/>
+          <a:p>
+            <a:endParaRPr lang="en-US"/>
+          </a:p>
+        </p:txBody>
+      </p:sp>
+      <p:sp>
+        <p:nvSpPr>
+          <p:cNvPr id="5" name="Notes Placeholder 4"/>
+          <p:cNvSpPr>
+            <a:spLocks noGrp="1"/>
+          </p:cNvSpPr>
+          <p:nvPr>
+            <p:ph type="body" sz="quarter" idx="3"/>
+          </p:nvPr>
+        </p:nvSpPr>
+        <p:spPr>
+          <a:xfrm>
+            <a:off x="685800" y="4400550"/>
+            <a:ext cx="5486400" cy="3600450"/>
+          </a:xfrm>
+          <a:prstGeom prst="rect">
+            <a:avLst/>
+          </a:prstGeom>
+        </p:spPr>
+        <p:txBody>
+          <a:bodyPr vert="horz" lIns="91440" tIns="45720" rIns="91440" bIns="45720" rtlCol="0"/>
+          <a:lstStyle/>
+          <a:p>
+            <a:pPr lvl="0"/>
+            <a:r>
+              <a:rPr lang="en-GB"/>
+              <a:t>Click to edit Master text styles</a:t>
+            </a:r>
+          </a:p>
+          <a:p>
+            <a:pPr lvl="1"/>
+            <a:r>
+              <a:rPr lang="en-GB"/>
+              <a:t>Second level</a:t>
+            </a:r>
+          </a:p>
+          <a:p>
+            <a:pPr lvl="2"/>
+            <a:r>
+              <a:rPr lang="en-GB"/>
+              <a:t>Third level</a:t>
+            </a:r>
+          </a:p>
+          <a:p>
+            <a:pPr lvl="3"/>
+            <a:r>
+              <a:rPr lang="en-GB"/>
+              <a:t>Fourth level</a:t>
+            </a:r>
+          </a:p>
+          <a:p>
+            <a:pPr lvl="4"/>
+            <a:r>
+              <a:rPr lang="en-GB"/>
+              <a:t>Fifth level</a:t>
+            </a:r>
+            <a:endParaRPr lang="en-US"/>
+          </a:p>
+        </p:txBody>
+      </p:sp>
+      <p:sp>
+        <p:nvSpPr>
+          <p:cNvPr id="6" name="Footer Placeholder 5"/>
+          <p:cNvSpPr>
+            <a:spLocks noGrp="1"/>
+          </p:cNvSpPr>
+          <p:nvPr>
+            <p:ph type="ftr" sz="quarter" idx="4"/>
+          </p:nvPr>
+        </p:nvSpPr>
+        <p:spPr>
+          <a:xfrm>
+            <a:off x="0" y="8685213"/>
+            <a:ext cx="2971800" cy="458787"/>
+          </a:xfrm>
+          <a:prstGeom prst="rect">
+            <a:avLst/>
+          </a:prstGeom>
+        </p:spPr>
+        <p:txBody>
+          <a:bodyPr vert="horz" lIns="91440" tIns="45720" rIns="91440" bIns="45720" rtlCol="0" anchor="b"/>
+          <a:lstStyle>
+            <a:lvl1pPr algn="l">
+              <a:defRPr sz="1200"/>
+            </a:lvl1pPr>
+          </a:lstStyle>
+          <a:p>
+            <a:endParaRPr lang="en-US"/>
+          </a:p>
+        </p:txBody>
+      </p:sp>
+      <p:sp>
+        <p:nvSpPr>
+          <p:cNvPr id="7" name="Slide Number Placeholder 6"/>
+          <p:cNvSpPr>
+            <a:spLocks noGrp="1"/>
+          </p:cNvSpPr>
+          <p:nvPr>
+            <p:ph type="sldNum" sz="quarter" idx="5"/>
+          </p:nvPr>
+        </p:nvSpPr>
+        <p:spPr>
+          <a:xfrm>
+            <a:off x="3884613" y="8685213"/>
+            <a:ext cx="2971800" cy="458787"/>
+          </a:xfrm>
+          <a:prstGeom prst="rect">
+            <a:avLst/>
+          </a:prstGeom>
+        </p:spPr>
+        <p:txBody>
+          <a:bodyPr vert="horz" lIns="91440" tIns="45720" rIns="91440" bIns="45720" rtlCol="0" anchor="b"/>
+          <a:lstStyle>
+            <a:lvl1pPr algn="r">
+              <a:defRPr sz="1200"/>
+            </a:lvl1pPr>
+          </a:lstStyle>
+          <a:p>
+            <a:fld id="{DC071681-C46F-A241-9777-2495E77DFB79}" type="slidenum">
+              <a:rPr lang="en-US" smtClean="0"/>
+              <a:t>‹#›</a:t>
+            </a:fld>
+            <a:endParaRPr lang="en-US"/>
+          </a:p>
+        </p:txBody>
+      </p:sp>
+    </p:spTree>
+    <p:extLst>
+      <p:ext uri="{BB962C8B-B14F-4D97-AF65-F5344CB8AC3E}">
+        <p14:creationId xmlns:p14="http://schemas.microsoft.com/office/powerpoint/2010/main" val="681939482"/>
+      </p:ext>
+    </p:extLst>
+  </p:cSld>
+  <p:clrMap bg1="lt1" tx1="dk1" bg2="lt2" tx2="dk2" accent1="accent1" accent2="accent2" accent3="accent3" accent4="accent4" accent5="accent5" accent6="accent6" hlink="hlink" folHlink="folHlink"/>
+  <p:notesStyle>
+    <a:lvl1pPr marL="0" algn="l" defTabSz="914400" rtl="0" eaLnBrk="1" latinLnBrk="0" hangingPunct="1">
+      <a:defRPr sz="1200" kern="1200">
+        <a:solidFill>
+          <a:schemeClr val="tx1"/>
+        </a:solidFill>
+        <a:latin typeface="+mn-lt"/>
+        <a:ea typeface="+mn-ea"/>
+        <a:cs typeface="+mn-cs"/>
+      </a:defRPr>
+    </a:lvl1pPr>
+    <a:lvl2pPr marL="457200" algn="l" defTabSz="914400" rtl="0" eaLnBrk="1" latinLnBrk="0" hangingPunct="1">
+      <a:defRPr sz="1200" kern="1200">
+        <a:solidFill>
+          <a:schemeClr val="tx1"/>
+        </a:solidFill>
+        <a:latin typeface="+mn-lt"/>
+        <a:ea typeface="+mn-ea"/>
+        <a:cs typeface="+mn-cs"/>
+      </a:defRPr>
+    </a:lvl2pPr>
+    <a:lvl3pPr marL="914400" algn="l" defTabSz="914400" rtl="0" eaLnBrk="1" latinLnBrk="0" hangingPunct="1">
+      <a:defRPr sz="1200" kern="1200">
+        <a:solidFill>
+          <a:schemeClr val="tx1"/>
+        </a:solidFill>
+        <a:latin typeface="+mn-lt"/>
+        <a:ea typeface="+mn-ea"/>
+        <a:cs typeface="+mn-cs"/>
+      </a:defRPr>
+    </a:lvl3pPr>
+    <a:lvl4pPr marL="1371600" algn="l" defTabSz="914400" rtl="0" eaLnBrk="1" latinLnBrk="0" hangingPunct="1">
+      <a:defRPr sz="1200" kern="1200">
+        <a:solidFill>
+          <a:schemeClr val="tx1"/>
+        </a:solidFill>
+        <a:latin typeface="+mn-lt"/>
+        <a:ea typeface="+mn-ea"/>
+        <a:cs typeface="+mn-cs"/>
+      </a:defRPr>
+    </a:lvl4pPr>
+    <a:lvl5pPr marL="1828800" algn="l" defTabSz="914400" rtl="0" eaLnBrk="1" latinLnBrk="0" hangingPunct="1">
+      <a:defRPr sz="1200" kern="1200">
+        <a:solidFill>
+          <a:schemeClr val="tx1"/>
+        </a:solidFill>
+        <a:latin typeface="+mn-lt"/>
+        <a:ea typeface="+mn-ea"/>
+        <a:cs typeface="+mn-cs"/>
+      </a:defRPr>
+    </a:lvl5pPr>
+    <a:lvl6pPr marL="2286000" algn="l" defTabSz="914400" rtl="0" eaLnBrk="1" latinLnBrk="0" hangingPunct="1">
+      <a:defRPr sz="1200" kern="1200">
+        <a:solidFill>
+          <a:schemeClr val="tx1"/>
+        </a:solidFill>
+        <a:latin typeface="+mn-lt"/>
+        <a:ea typeface="+mn-ea"/>
+        <a:cs typeface="+mn-cs"/>
+      </a:defRPr>
+    </a:lvl6pPr>
+    <a:lvl7pPr marL="2743200" algn="l" defTabSz="914400" rtl="0" eaLnBrk="1" latinLnBrk="0" hangingPunct="1">
+      <a:defRPr sz="1200" kern="1200">
+        <a:solidFill>
+          <a:schemeClr val="tx1"/>
+        </a:solidFill>
+        <a:latin typeface="+mn-lt"/>
+        <a:ea typeface="+mn-ea"/>
+        <a:cs typeface="+mn-cs"/>
+      </a:defRPr>
+    </a:lvl7pPr>
+    <a:lvl8pPr marL="3200400" algn="l" defTabSz="914400" rtl="0" eaLnBrk="1" latinLnBrk="0" hangingPunct="1">
+      <a:defRPr sz="1200" kern="1200">
+        <a:solidFill>
+          <a:schemeClr val="tx1"/>
+        </a:solidFill>
+        <a:latin typeface="+mn-lt"/>
+        <a:ea typeface="+mn-ea"/>
+        <a:cs typeface="+mn-cs"/>
+      </a:defRPr>
+    </a:lvl8pPr>
+    <a:lvl9pPr marL="3657600" algn="l" defTabSz="914400" rtl="0" eaLnBrk="1" latinLnBrk="0" hangingPunct="1">
+      <a:defRPr sz="1200" kern="1200">
+        <a:solidFill>
+          <a:schemeClr val="tx1"/>
+        </a:solidFill>
+        <a:latin typeface="+mn-lt"/>
+        <a:ea typeface="+mn-ea"/>
+        <a:cs typeface="+mn-cs"/>
+      </a:defRPr>
+    </a:lvl9pPr>
+  </p:notesStyle>
+</p:notesMaster>
+</file>
+
+<file path=ppt/notesSlides/notesSlide1.xml><?xml version="1.0" encoding="utf-8"?>
+<p:notes xmlns:a="http://schemas.openxmlformats.org/drawingml/2006/main" xmlns:r="http://schemas.openxmlformats.org/officeDocument/2006/relationships" xmlns:p="http://schemas.openxmlformats.org/presentationml/2006/main">
+  <p:cSld>
+    <p:spTree>
+      <p:nvGrpSpPr>
+        <p:cNvPr id="1" name=""/>
+        <p:cNvGrpSpPr/>
+        <p:nvPr/>
+      </p:nvGrpSpPr>
+      <p:grpSpPr>
+        <a:xfrm>
+          <a:off x="0" y="0"/>
+          <a:ext cx="0" cy="0"/>
+          <a:chOff x="0" y="0"/>
+          <a:chExt cx="0" cy="0"/>
+        </a:xfrm>
+      </p:grpSpPr>
+      <p:sp>
+        <p:nvSpPr>
+          <p:cNvPr id="2" name="Slide Image Placeholder 1"/>
+          <p:cNvSpPr>
+            <a:spLocks noGrp="1" noRot="1" noChangeAspect="1"/>
+          </p:cNvSpPr>
+          <p:nvPr>
+            <p:ph type="sldImg"/>
+          </p:nvPr>
+        </p:nvSpPr>
+        <p:spPr/>
+      </p:sp>
+      <p:sp>
+        <p:nvSpPr>
+          <p:cNvPr id="3" name="Notes Placeholder 2"/>
+          <p:cNvSpPr>
+            <a:spLocks noGrp="1"/>
+          </p:cNvSpPr>
+          <p:nvPr>
+            <p:ph type="body" idx="1"/>
+          </p:nvPr>
+        </p:nvSpPr>
+        <p:spPr/>
+        <p:txBody>
+          <a:bodyPr/>
+          <a:lstStyle/>
+          <a:p>
+            <a:r>
+              <a:rPr lang="en-IN" dirty="0"/>
+              <a:t>The Desk vs. The Warehouse (LO2)</a:t>
+            </a:r>
+            <a:endParaRPr lang="en-US" dirty="0"/>
+          </a:p>
+        </p:txBody>
+      </p:sp>
+      <p:sp>
+        <p:nvSpPr>
+          <p:cNvPr id="4" name="Slide Number Placeholder 3"/>
+          <p:cNvSpPr>
+            <a:spLocks noGrp="1"/>
+          </p:cNvSpPr>
+          <p:nvPr>
+            <p:ph type="sldNum" sz="quarter" idx="5"/>
+          </p:nvPr>
+        </p:nvSpPr>
+        <p:spPr/>
+        <p:txBody>
+          <a:bodyPr/>
+          <a:lstStyle/>
+          <a:p>
+            <a:fld id="{DC071681-C46F-A241-9777-2495E77DFB79}" type="slidenum">
+              <a:rPr lang="en-US" smtClean="0"/>
+              <a:t>3</a:t>
+            </a:fld>
+            <a:endParaRPr lang="en-US"/>
+          </a:p>
+        </p:txBody>
+      </p:sp>
+    </p:spTree>
+    <p:extLst>
+      <p:ext uri="{BB962C8B-B14F-4D97-AF65-F5344CB8AC3E}">
+        <p14:creationId xmlns:p14="http://schemas.microsoft.com/office/powerpoint/2010/main" val="71924780"/>
+      </p:ext>
+    </p:extLst>
+  </p:cSld>
+  <p:clrMapOvr>
+    <a:masterClrMapping/>
+  </p:clrMapOvr>
+</p:notes>
 </file>
 
 <file path=ppt/slideLayouts/slideLayout1.xml><?xml version="1.0" encoding="utf-8"?>
@@ -156,10 +613,9 @@
           <a:lstStyle/>
           <a:p>
             <a:r>
-              <a:rPr lang="en-US" smtClean="0"/>
+              <a:rPr lang="en-US"/>
               <a:t>Click to edit Master title style</a:t>
             </a:r>
-            <a:endParaRPr lang="en-US"/>
           </a:p>
         </p:txBody>
       </p:sp>
@@ -275,10 +731,9 @@
           </a:lstStyle>
           <a:p>
             <a:r>
-              <a:rPr lang="en-US" smtClean="0"/>
+              <a:rPr lang="en-US"/>
               <a:t>Click to edit Master subtitle style</a:t>
             </a:r>
-            <a:endParaRPr lang="en-US"/>
           </a:p>
         </p:txBody>
       </p:sp>
@@ -299,7 +754,7 @@
           <a:p>
             <a:fld id="{5BCAD085-E8A6-8845-BD4E-CB4CCA059FC4}" type="datetimeFigureOut">
               <a:rPr lang="en-US" smtClean="0"/>
-              <a:t>1/27/13</a:t>
+              <a:t>10/23/26</a:t>
             </a:fld>
             <a:endParaRPr lang="en-US"/>
           </a:p>
@@ -393,10 +848,9 @@
           <a:lstStyle/>
           <a:p>
             <a:r>
-              <a:rPr lang="en-US" smtClean="0"/>
+              <a:rPr lang="en-US"/>
               <a:t>Click to edit Master title style</a:t>
             </a:r>
-            <a:endParaRPr lang="en-US"/>
           </a:p>
         </p:txBody>
       </p:sp>
@@ -417,38 +871,37 @@
           <a:p>
             <a:pPr lvl="0"/>
             <a:r>
-              <a:rPr lang="en-US" smtClean="0"/>
+              <a:rPr lang="en-US"/>
               <a:t>Click to edit Master text styles</a:t>
             </a:r>
           </a:p>
           <a:p>
             <a:pPr lvl="1"/>
             <a:r>
-              <a:rPr lang="en-US" smtClean="0"/>
+              <a:rPr lang="en-US"/>
               <a:t>Second level</a:t>
             </a:r>
           </a:p>
           <a:p>
             <a:pPr lvl="2"/>
             <a:r>
-              <a:rPr lang="en-US" smtClean="0"/>
+              <a:rPr lang="en-US"/>
               <a:t>Third level</a:t>
             </a:r>
           </a:p>
           <a:p>
             <a:pPr lvl="3"/>
             <a:r>
-              <a:rPr lang="en-US" smtClean="0"/>
+              <a:rPr lang="en-US"/>
               <a:t>Fourth level</a:t>
             </a:r>
           </a:p>
           <a:p>
             <a:pPr lvl="4"/>
             <a:r>
-              <a:rPr lang="en-US" smtClean="0"/>
+              <a:rPr lang="en-US"/>
               <a:t>Fifth level</a:t>
             </a:r>
-            <a:endParaRPr lang="en-US"/>
           </a:p>
         </p:txBody>
       </p:sp>
@@ -469,7 +922,7 @@
           <a:p>
             <a:fld id="{5BCAD085-E8A6-8845-BD4E-CB4CCA059FC4}" type="datetimeFigureOut">
               <a:rPr lang="en-US" smtClean="0"/>
-              <a:t>1/27/13</a:t>
+              <a:t>10/23/26</a:t>
             </a:fld>
             <a:endParaRPr lang="en-US"/>
           </a:p>
@@ -568,10 +1021,9 @@
           <a:lstStyle/>
           <a:p>
             <a:r>
-              <a:rPr lang="en-US" smtClean="0"/>
+              <a:rPr lang="en-US"/>
               <a:t>Click to edit Master title style</a:t>
             </a:r>
-            <a:endParaRPr lang="en-US"/>
           </a:p>
         </p:txBody>
       </p:sp>
@@ -597,38 +1049,37 @@
           <a:p>
             <a:pPr lvl="0"/>
             <a:r>
-              <a:rPr lang="en-US" smtClean="0"/>
+              <a:rPr lang="en-US"/>
               <a:t>Click to edit Master text styles</a:t>
             </a:r>
           </a:p>
           <a:p>
             <a:pPr lvl="1"/>
             <a:r>
-              <a:rPr lang="en-US" smtClean="0"/>
+              <a:rPr lang="en-US"/>
               <a:t>Second level</a:t>
             </a:r>
           </a:p>
           <a:p>
             <a:pPr lvl="2"/>
             <a:r>
-              <a:rPr lang="en-US" smtClean="0"/>
+              <a:rPr lang="en-US"/>
               <a:t>Third level</a:t>
             </a:r>
           </a:p>
           <a:p>
             <a:pPr lvl="3"/>
             <a:r>
-              <a:rPr lang="en-US" smtClean="0"/>
+              <a:rPr lang="en-US"/>
               <a:t>Fourth level</a:t>
             </a:r>
           </a:p>
           <a:p>
             <a:pPr lvl="4"/>
             <a:r>
-              <a:rPr lang="en-US" smtClean="0"/>
+              <a:rPr lang="en-US"/>
               <a:t>Fifth level</a:t>
             </a:r>
-            <a:endParaRPr lang="en-US"/>
           </a:p>
         </p:txBody>
       </p:sp>
@@ -649,7 +1100,7 @@
           <a:p>
             <a:fld id="{5BCAD085-E8A6-8845-BD4E-CB4CCA059FC4}" type="datetimeFigureOut">
               <a:rPr lang="en-US" smtClean="0"/>
-              <a:t>1/27/13</a:t>
+              <a:t>10/23/26</a:t>
             </a:fld>
             <a:endParaRPr lang="en-US"/>
           </a:p>
@@ -743,10 +1194,9 @@
           <a:lstStyle/>
           <a:p>
             <a:r>
-              <a:rPr lang="en-US" smtClean="0"/>
+              <a:rPr lang="en-US"/>
               <a:t>Click to edit Master title style</a:t>
             </a:r>
-            <a:endParaRPr lang="en-US"/>
           </a:p>
         </p:txBody>
       </p:sp>
@@ -767,38 +1217,37 @@
           <a:p>
             <a:pPr lvl="0"/>
             <a:r>
-              <a:rPr lang="en-US" smtClean="0"/>
+              <a:rPr lang="en-US"/>
               <a:t>Click to edit Master text styles</a:t>
             </a:r>
           </a:p>
           <a:p>
             <a:pPr lvl="1"/>
             <a:r>
-              <a:rPr lang="en-US" smtClean="0"/>
+              <a:rPr lang="en-US"/>
               <a:t>Second level</a:t>
             </a:r>
           </a:p>
           <a:p>
             <a:pPr lvl="2"/>
             <a:r>
-              <a:rPr lang="en-US" smtClean="0"/>
+              <a:rPr lang="en-US"/>
               <a:t>Third level</a:t>
             </a:r>
           </a:p>
           <a:p>
             <a:pPr lvl="3"/>
             <a:r>
-              <a:rPr lang="en-US" smtClean="0"/>
+              <a:rPr lang="en-US"/>
               <a:t>Fourth level</a:t>
             </a:r>
           </a:p>
           <a:p>
             <a:pPr lvl="4"/>
             <a:r>
-              <a:rPr lang="en-US" smtClean="0"/>
+              <a:rPr lang="en-US"/>
               <a:t>Fifth level</a:t>
             </a:r>
-            <a:endParaRPr lang="en-US"/>
           </a:p>
         </p:txBody>
       </p:sp>
@@ -819,7 +1268,7 @@
           <a:p>
             <a:fld id="{5BCAD085-E8A6-8845-BD4E-CB4CCA059FC4}" type="datetimeFigureOut">
               <a:rPr lang="en-US" smtClean="0"/>
-              <a:t>1/27/13</a:t>
+              <a:t>10/23/26</a:t>
             </a:fld>
             <a:endParaRPr lang="en-US"/>
           </a:p>
@@ -922,10 +1371,9 @@
           </a:lstStyle>
           <a:p>
             <a:r>
-              <a:rPr lang="en-US" smtClean="0"/>
+              <a:rPr lang="en-US"/>
               <a:t>Click to edit Master title style</a:t>
             </a:r>
-            <a:endParaRPr lang="en-US"/>
           </a:p>
         </p:txBody>
       </p:sp>
@@ -1042,7 +1490,7 @@
           <a:p>
             <a:pPr lvl="0"/>
             <a:r>
-              <a:rPr lang="en-US" smtClean="0"/>
+              <a:rPr lang="en-US"/>
               <a:t>Click to edit Master text styles</a:t>
             </a:r>
           </a:p>
@@ -1065,7 +1513,7 @@
           <a:p>
             <a:fld id="{5BCAD085-E8A6-8845-BD4E-CB4CCA059FC4}" type="datetimeFigureOut">
               <a:rPr lang="en-US" smtClean="0"/>
-              <a:t>1/27/13</a:t>
+              <a:t>10/23/26</a:t>
             </a:fld>
             <a:endParaRPr lang="en-US"/>
           </a:p>
@@ -1159,10 +1607,9 @@
           <a:lstStyle/>
           <a:p>
             <a:r>
-              <a:rPr lang="en-US" smtClean="0"/>
+              <a:rPr lang="en-US"/>
               <a:t>Click to edit Master title style</a:t>
             </a:r>
-            <a:endParaRPr lang="en-US"/>
           </a:p>
         </p:txBody>
       </p:sp>
@@ -1216,38 +1663,37 @@
           <a:p>
             <a:pPr lvl="0"/>
             <a:r>
-              <a:rPr lang="en-US" smtClean="0"/>
+              <a:rPr lang="en-US"/>
               <a:t>Click to edit Master text styles</a:t>
             </a:r>
           </a:p>
           <a:p>
             <a:pPr lvl="1"/>
             <a:r>
-              <a:rPr lang="en-US" smtClean="0"/>
+              <a:rPr lang="en-US"/>
               <a:t>Second level</a:t>
             </a:r>
           </a:p>
           <a:p>
             <a:pPr lvl="2"/>
             <a:r>
-              <a:rPr lang="en-US" smtClean="0"/>
+              <a:rPr lang="en-US"/>
               <a:t>Third level</a:t>
             </a:r>
           </a:p>
           <a:p>
             <a:pPr lvl="3"/>
             <a:r>
-              <a:rPr lang="en-US" smtClean="0"/>
+              <a:rPr lang="en-US"/>
               <a:t>Fourth level</a:t>
             </a:r>
           </a:p>
           <a:p>
             <a:pPr lvl="4"/>
             <a:r>
-              <a:rPr lang="en-US" smtClean="0"/>
+              <a:rPr lang="en-US"/>
               <a:t>Fifth level</a:t>
             </a:r>
-            <a:endParaRPr lang="en-US"/>
           </a:p>
         </p:txBody>
       </p:sp>
@@ -1301,38 +1747,37 @@
           <a:p>
             <a:pPr lvl="0"/>
             <a:r>
-              <a:rPr lang="en-US" smtClean="0"/>
+              <a:rPr lang="en-US"/>
               <a:t>Click to edit Master text styles</a:t>
             </a:r>
           </a:p>
           <a:p>
             <a:pPr lvl="1"/>
             <a:r>
-              <a:rPr lang="en-US" smtClean="0"/>
+              <a:rPr lang="en-US"/>
               <a:t>Second level</a:t>
             </a:r>
           </a:p>
           <a:p>
             <a:pPr lvl="2"/>
             <a:r>
-              <a:rPr lang="en-US" smtClean="0"/>
+              <a:rPr lang="en-US"/>
               <a:t>Third level</a:t>
             </a:r>
           </a:p>
           <a:p>
             <a:pPr lvl="3"/>
             <a:r>
-              <a:rPr lang="en-US" smtClean="0"/>
+              <a:rPr lang="en-US"/>
               <a:t>Fourth level</a:t>
             </a:r>
           </a:p>
           <a:p>
             <a:pPr lvl="4"/>
             <a:r>
-              <a:rPr lang="en-US" smtClean="0"/>
+              <a:rPr lang="en-US"/>
               <a:t>Fifth level</a:t>
             </a:r>
-            <a:endParaRPr lang="en-US"/>
           </a:p>
         </p:txBody>
       </p:sp>
@@ -1353,7 +1798,7 @@
           <a:p>
             <a:fld id="{5BCAD085-E8A6-8845-BD4E-CB4CCA059FC4}" type="datetimeFigureOut">
               <a:rPr lang="en-US" smtClean="0"/>
-              <a:t>1/27/13</a:t>
+              <a:t>10/23/26</a:t>
             </a:fld>
             <a:endParaRPr lang="en-US"/>
           </a:p>
@@ -1451,10 +1896,9 @@
           </a:lstStyle>
           <a:p>
             <a:r>
-              <a:rPr lang="en-US" smtClean="0"/>
+              <a:rPr lang="en-US"/>
               <a:t>Click to edit Master title style</a:t>
             </a:r>
-            <a:endParaRPr lang="en-US"/>
           </a:p>
         </p:txBody>
       </p:sp>
@@ -1517,7 +1961,7 @@
           <a:p>
             <a:pPr lvl="0"/>
             <a:r>
-              <a:rPr lang="en-US" smtClean="0"/>
+              <a:rPr lang="en-US"/>
               <a:t>Click to edit Master text styles</a:t>
             </a:r>
           </a:p>
@@ -1573,38 +2017,37 @@
           <a:p>
             <a:pPr lvl="0"/>
             <a:r>
-              <a:rPr lang="en-US" smtClean="0"/>
+              <a:rPr lang="en-US"/>
               <a:t>Click to edit Master text styles</a:t>
             </a:r>
           </a:p>
           <a:p>
             <a:pPr lvl="1"/>
             <a:r>
-              <a:rPr lang="en-US" smtClean="0"/>
+              <a:rPr lang="en-US"/>
               <a:t>Second level</a:t>
             </a:r>
           </a:p>
           <a:p>
             <a:pPr lvl="2"/>
             <a:r>
-              <a:rPr lang="en-US" smtClean="0"/>
+              <a:rPr lang="en-US"/>
               <a:t>Third level</a:t>
             </a:r>
           </a:p>
           <a:p>
             <a:pPr lvl="3"/>
             <a:r>
-              <a:rPr lang="en-US" smtClean="0"/>
+              <a:rPr lang="en-US"/>
               <a:t>Fourth level</a:t>
             </a:r>
           </a:p>
           <a:p>
             <a:pPr lvl="4"/>
             <a:r>
-              <a:rPr lang="en-US" smtClean="0"/>
+              <a:rPr lang="en-US"/>
               <a:t>Fifth level</a:t>
             </a:r>
-            <a:endParaRPr lang="en-US"/>
           </a:p>
         </p:txBody>
       </p:sp>
@@ -1667,7 +2110,7 @@
           <a:p>
             <a:pPr lvl="0"/>
             <a:r>
-              <a:rPr lang="en-US" smtClean="0"/>
+              <a:rPr lang="en-US"/>
               <a:t>Click to edit Master text styles</a:t>
             </a:r>
           </a:p>
@@ -1723,38 +2166,37 @@
           <a:p>
             <a:pPr lvl="0"/>
             <a:r>
-              <a:rPr lang="en-US" smtClean="0"/>
+              <a:rPr lang="en-US"/>
               <a:t>Click to edit Master text styles</a:t>
             </a:r>
           </a:p>
           <a:p>
             <a:pPr lvl="1"/>
             <a:r>
-              <a:rPr lang="en-US" smtClean="0"/>
+              <a:rPr lang="en-US"/>
               <a:t>Second level</a:t>
             </a:r>
           </a:p>
           <a:p>
             <a:pPr lvl="2"/>
             <a:r>
-              <a:rPr lang="en-US" smtClean="0"/>
+              <a:rPr lang="en-US"/>
               <a:t>Third level</a:t>
             </a:r>
           </a:p>
           <a:p>
             <a:pPr lvl="3"/>
             <a:r>
-              <a:rPr lang="en-US" smtClean="0"/>
+              <a:rPr lang="en-US"/>
               <a:t>Fourth level</a:t>
             </a:r>
           </a:p>
           <a:p>
             <a:pPr lvl="4"/>
             <a:r>
-              <a:rPr lang="en-US" smtClean="0"/>
+              <a:rPr lang="en-US"/>
               <a:t>Fifth level</a:t>
             </a:r>
-            <a:endParaRPr lang="en-US"/>
           </a:p>
         </p:txBody>
       </p:sp>
@@ -1775,7 +2217,7 @@
           <a:p>
             <a:fld id="{5BCAD085-E8A6-8845-BD4E-CB4CCA059FC4}" type="datetimeFigureOut">
               <a:rPr lang="en-US" smtClean="0"/>
-              <a:t>1/27/13</a:t>
+              <a:t>10/23/26</a:t>
             </a:fld>
             <a:endParaRPr lang="en-US"/>
           </a:p>
@@ -1869,10 +2311,9 @@
           <a:lstStyle/>
           <a:p>
             <a:r>
-              <a:rPr lang="en-US" smtClean="0"/>
+              <a:rPr lang="en-US"/>
               <a:t>Click to edit Master title style</a:t>
             </a:r>
-            <a:endParaRPr lang="en-US"/>
           </a:p>
         </p:txBody>
       </p:sp>
@@ -1893,7 +2334,7 @@
           <a:p>
             <a:fld id="{5BCAD085-E8A6-8845-BD4E-CB4CCA059FC4}" type="datetimeFigureOut">
               <a:rPr lang="en-US" smtClean="0"/>
-              <a:t>1/27/13</a:t>
+              <a:t>10/23/26</a:t>
             </a:fld>
             <a:endParaRPr lang="en-US"/>
           </a:p>
@@ -1988,7 +2429,7 @@
           <a:p>
             <a:fld id="{5BCAD085-E8A6-8845-BD4E-CB4CCA059FC4}" type="datetimeFigureOut">
               <a:rPr lang="en-US" smtClean="0"/>
-              <a:t>1/27/13</a:t>
+              <a:t>10/23/26</a:t>
             </a:fld>
             <a:endParaRPr lang="en-US"/>
           </a:p>
@@ -2091,10 +2532,9 @@
           </a:lstStyle>
           <a:p>
             <a:r>
-              <a:rPr lang="en-US" smtClean="0"/>
+              <a:rPr lang="en-US"/>
               <a:t>Click to edit Master title style</a:t>
             </a:r>
-            <a:endParaRPr lang="en-US"/>
           </a:p>
         </p:txBody>
       </p:sp>
@@ -2148,38 +2588,37 @@
           <a:p>
             <a:pPr lvl="0"/>
             <a:r>
-              <a:rPr lang="en-US" smtClean="0"/>
+              <a:rPr lang="en-US"/>
               <a:t>Click to edit Master text styles</a:t>
             </a:r>
           </a:p>
           <a:p>
             <a:pPr lvl="1"/>
             <a:r>
-              <a:rPr lang="en-US" smtClean="0"/>
+              <a:rPr lang="en-US"/>
               <a:t>Second level</a:t>
             </a:r>
           </a:p>
           <a:p>
             <a:pPr lvl="2"/>
             <a:r>
-              <a:rPr lang="en-US" smtClean="0"/>
+              <a:rPr lang="en-US"/>
               <a:t>Third level</a:t>
             </a:r>
           </a:p>
           <a:p>
             <a:pPr lvl="3"/>
             <a:r>
-              <a:rPr lang="en-US" smtClean="0"/>
+              <a:rPr lang="en-US"/>
               <a:t>Fourth level</a:t>
             </a:r>
           </a:p>
           <a:p>
             <a:pPr lvl="4"/>
             <a:r>
-              <a:rPr lang="en-US" smtClean="0"/>
+              <a:rPr lang="en-US"/>
               <a:t>Fifth level</a:t>
             </a:r>
-            <a:endParaRPr lang="en-US"/>
           </a:p>
         </p:txBody>
       </p:sp>
@@ -2242,7 +2681,7 @@
           <a:p>
             <a:pPr lvl="0"/>
             <a:r>
-              <a:rPr lang="en-US" smtClean="0"/>
+              <a:rPr lang="en-US"/>
               <a:t>Click to edit Master text styles</a:t>
             </a:r>
           </a:p>
@@ -2265,7 +2704,7 @@
           <a:p>
             <a:fld id="{5BCAD085-E8A6-8845-BD4E-CB4CCA059FC4}" type="datetimeFigureOut">
               <a:rPr lang="en-US" smtClean="0"/>
-              <a:t>1/27/13</a:t>
+              <a:t>10/23/26</a:t>
             </a:fld>
             <a:endParaRPr lang="en-US"/>
           </a:p>
@@ -2368,10 +2807,9 @@
           </a:lstStyle>
           <a:p>
             <a:r>
-              <a:rPr lang="en-US" smtClean="0"/>
+              <a:rPr lang="en-US"/>
               <a:t>Click to edit Master title style</a:t>
             </a:r>
-            <a:endParaRPr lang="en-US"/>
           </a:p>
         </p:txBody>
       </p:sp>
@@ -2495,7 +2933,7 @@
           <a:p>
             <a:pPr lvl="0"/>
             <a:r>
-              <a:rPr lang="en-US" smtClean="0"/>
+              <a:rPr lang="en-US"/>
               <a:t>Click to edit Master text styles</a:t>
             </a:r>
           </a:p>
@@ -2518,7 +2956,7 @@
           <a:p>
             <a:fld id="{5BCAD085-E8A6-8845-BD4E-CB4CCA059FC4}" type="datetimeFigureOut">
               <a:rPr lang="en-US" smtClean="0"/>
-              <a:t>1/27/13</a:t>
+              <a:t>10/23/26</a:t>
             </a:fld>
             <a:endParaRPr lang="en-US"/>
           </a:p>
@@ -2627,10 +3065,9 @@
           <a:lstStyle/>
           <a:p>
             <a:r>
-              <a:rPr lang="en-US" smtClean="0"/>
+              <a:rPr lang="en-US"/>
               <a:t>Click to edit Master title style</a:t>
             </a:r>
-            <a:endParaRPr lang="en-US"/>
           </a:p>
         </p:txBody>
       </p:sp>
@@ -2661,38 +3098,37 @@
           <a:p>
             <a:pPr lvl="0"/>
             <a:r>
-              <a:rPr lang="en-US" smtClean="0"/>
+              <a:rPr lang="en-US"/>
               <a:t>Click to edit Master text styles</a:t>
             </a:r>
           </a:p>
           <a:p>
             <a:pPr lvl="1"/>
             <a:r>
-              <a:rPr lang="en-US" smtClean="0"/>
+              <a:rPr lang="en-US"/>
               <a:t>Second level</a:t>
             </a:r>
           </a:p>
           <a:p>
             <a:pPr lvl="2"/>
             <a:r>
-              <a:rPr lang="en-US" smtClean="0"/>
+              <a:rPr lang="en-US"/>
               <a:t>Third level</a:t>
             </a:r>
           </a:p>
           <a:p>
             <a:pPr lvl="3"/>
             <a:r>
-              <a:rPr lang="en-US" smtClean="0"/>
+              <a:rPr lang="en-US"/>
               <a:t>Fourth level</a:t>
             </a:r>
           </a:p>
           <a:p>
             <a:pPr lvl="4"/>
             <a:r>
-              <a:rPr lang="en-US" smtClean="0"/>
+              <a:rPr lang="en-US"/>
               <a:t>Fifth level</a:t>
             </a:r>
-            <a:endParaRPr lang="en-US"/>
           </a:p>
         </p:txBody>
       </p:sp>
@@ -2731,7 +3167,7 @@
           <a:p>
             <a:fld id="{5BCAD085-E8A6-8845-BD4E-CB4CCA059FC4}" type="datetimeFigureOut">
               <a:rPr lang="en-US" smtClean="0"/>
-              <a:t>1/27/13</a:t>
+              <a:t>10/23/26</a:t>
             </a:fld>
             <a:endParaRPr lang="en-US"/>
           </a:p>
@@ -3090,7 +3526,7 @@
 </file>
 
 <file path=ppt/slides/slide1.xml><?xml version="1.0" encoding="utf-8"?>
-<p:sld xmlns:a="http://schemas.openxmlformats.org/drawingml/2006/main" xmlns:p="http://schemas.openxmlformats.org/presentationml/2006/main" xmlns:r="http://schemas.openxmlformats.org/officeDocument/2006/relationships">
+<p:sld xmlns:a="http://schemas.openxmlformats.org/drawingml/2006/main" xmlns:r="http://schemas.openxmlformats.org/officeDocument/2006/relationships" xmlns:p="http://schemas.openxmlformats.org/presentationml/2006/main">
   <p:cSld>
     <p:spTree>
       <p:nvGrpSpPr>
@@ -3098,7 +3534,14 @@
         <p:cNvGrpSpPr/>
         <p:nvPr/>
       </p:nvGrpSpPr>
-      <p:grpSpPr/>
+      <p:grpSpPr>
+        <a:xfrm>
+          <a:off x="0" y="0"/>
+          <a:ext cx="0" cy="0"/>
+          <a:chOff x="0" y="0"/>
+          <a:chExt cx="0" cy="0"/>
+        </a:xfrm>
+      </p:grpSpPr>
       <p:sp>
         <p:nvSpPr>
           <p:cNvPr id="2" name="Rectangle 1"/>
@@ -3139,6 +3582,7 @@
           <a:lstStyle/>
           <a:p>
             <a:pPr algn="ctr"/>
+            <a:endParaRPr/>
           </a:p>
         </p:txBody>
       </p:sp>
@@ -3193,26 +3637,12 @@
           </a:p>
           <a:p>
             <a:br/>
-            <a:pPr>
-              <a:defRPr sz="1700">
-                <a:solidFill>
-                  <a:srgbClr val="94A3B8"/>
-                </a:solidFill>
-              </a:defRPr>
-            </a:pPr>
             <a:r>
               <a:t>A Failure-First Production Masterclass: Step 1 (Trap) ➔ Step 2 (Clean Fix)</a:t>
             </a:r>
           </a:p>
           <a:p>
             <a:br/>
-            <a:pPr>
-              <a:defRPr sz="1400">
-                <a:solidFill>
-                  <a:srgbClr val="38BDF8"/>
-                </a:solidFill>
-              </a:defRPr>
-            </a:pPr>
             <a:r>
               <a:t>Presenter: Ananda Palani | Senior Software Engineer &amp; Tech Lead (16+ Years Experience)</a:t>
             </a:r>
@@ -3228,7 +3658,7 @@
 </file>
 
 <file path=ppt/slides/slide10.xml><?xml version="1.0" encoding="utf-8"?>
-<p:sld xmlns:a="http://schemas.openxmlformats.org/drawingml/2006/main" xmlns:p="http://schemas.openxmlformats.org/presentationml/2006/main" xmlns:r="http://schemas.openxmlformats.org/officeDocument/2006/relationships">
+<p:sld xmlns:a="http://schemas.openxmlformats.org/drawingml/2006/main" xmlns:r="http://schemas.openxmlformats.org/officeDocument/2006/relationships" xmlns:p="http://schemas.openxmlformats.org/presentationml/2006/main">
   <p:cSld>
     <p:spTree>
       <p:nvGrpSpPr>
@@ -3236,7 +3666,14 @@
         <p:cNvGrpSpPr/>
         <p:nvPr/>
       </p:nvGrpSpPr>
-      <p:grpSpPr/>
+      <p:grpSpPr>
+        <a:xfrm>
+          <a:off x="0" y="0"/>
+          <a:ext cx="0" cy="0"/>
+          <a:chOff x="0" y="0"/>
+          <a:chExt cx="0" cy="0"/>
+        </a:xfrm>
+      </p:grpSpPr>
       <p:sp>
         <p:nvSpPr>
           <p:cNvPr id="2" name="Rectangle 1"/>
@@ -3277,6 +3714,7 @@
           <a:lstStyle/>
           <a:p>
             <a:pPr algn="ctr"/>
+            <a:endParaRPr/>
           </a:p>
         </p:txBody>
       </p:sp>
@@ -3400,7 +3838,7 @@
           </a:fontRef>
         </p:style>
         <p:txBody>
-          <a:bodyPr rtlCol="0" anchor="ctr" wrap="square"/>
+          <a:bodyPr wrap="square" rtlCol="0" anchor="ctr"/>
           <a:lstStyle/>
           <a:p>
             <a:pPr algn="ctr">
@@ -3416,13 +3854,6 @@
           </a:p>
           <a:p>
             <a:br/>
-            <a:pPr>
-              <a:defRPr sz="1200">
-                <a:solidFill>
-                  <a:srgbClr val="F8FAFC"/>
-                </a:solidFill>
-              </a:defRPr>
-            </a:pPr>
             <a:r>
               <a:t>• Missing Visibility Marks: Forgetting '-' for private attributes and '+' for public methods.</a:t>
             </a:r>
@@ -3479,7 +3910,7 @@
           </a:fontRef>
         </p:style>
         <p:txBody>
-          <a:bodyPr rtlCol="0" anchor="ctr" wrap="square"/>
+          <a:bodyPr wrap="square" rtlCol="0" anchor="ctr"/>
           <a:lstStyle/>
           <a:p>
             <a:pPr algn="ctr">
@@ -3495,13 +3926,6 @@
           </a:p>
           <a:p>
             <a:br/>
-            <a:pPr>
-              <a:defRPr sz="1200">
-                <a:solidFill>
-                  <a:srgbClr val="F8FAFC"/>
-                </a:solidFill>
-              </a:defRPr>
-            </a:pPr>
             <a:r>
               <a:t>• 3-Compartment Class Box:</a:t>
             </a:r>
@@ -3569,7 +3993,7 @@
           </a:fontRef>
         </p:style>
         <p:txBody>
-          <a:bodyPr rtlCol="0" anchor="ctr" wrap="square"/>
+          <a:bodyPr wrap="square" rtlCol="0" anchor="ctr"/>
           <a:lstStyle/>
           <a:p>
             <a:pPr algn="ctr">
@@ -3594,7 +4018,7 @@
 </file>
 
 <file path=ppt/slides/slide11.xml><?xml version="1.0" encoding="utf-8"?>
-<p:sld xmlns:a="http://schemas.openxmlformats.org/drawingml/2006/main" xmlns:p="http://schemas.openxmlformats.org/presentationml/2006/main" xmlns:r="http://schemas.openxmlformats.org/officeDocument/2006/relationships">
+<p:sld xmlns:a="http://schemas.openxmlformats.org/drawingml/2006/main" xmlns:r="http://schemas.openxmlformats.org/officeDocument/2006/relationships" xmlns:p="http://schemas.openxmlformats.org/presentationml/2006/main">
   <p:cSld>
     <p:spTree>
       <p:nvGrpSpPr>
@@ -3602,7 +4026,14 @@
         <p:cNvGrpSpPr/>
         <p:nvPr/>
       </p:nvGrpSpPr>
-      <p:grpSpPr/>
+      <p:grpSpPr>
+        <a:xfrm>
+          <a:off x="0" y="0"/>
+          <a:ext cx="0" cy="0"/>
+          <a:chOff x="0" y="0"/>
+          <a:chExt cx="0" cy="0"/>
+        </a:xfrm>
+      </p:grpSpPr>
       <p:sp>
         <p:nvSpPr>
           <p:cNvPr id="2" name="Rectangle 1"/>
@@ -3643,6 +4074,7 @@
           <a:lstStyle/>
           <a:p>
             <a:pPr algn="ctr"/>
+            <a:endParaRPr/>
           </a:p>
         </p:txBody>
       </p:sp>
@@ -3766,7 +4198,7 @@
           </a:fontRef>
         </p:style>
         <p:txBody>
-          <a:bodyPr rtlCol="0" anchor="ctr" wrap="square"/>
+          <a:bodyPr wrap="square" rtlCol="0" anchor="ctr"/>
           <a:lstStyle/>
           <a:p>
             <a:pPr algn="ctr">
@@ -3782,13 +4214,6 @@
           </a:p>
           <a:p>
             <a:br/>
-            <a:pPr>
-              <a:defRPr sz="1200">
-                <a:solidFill>
-                  <a:srgbClr val="F8FAFC"/>
-                </a:solidFill>
-              </a:defRPr>
-            </a:pPr>
             <a:r>
               <a:t>Tx-1: Locks Inventory -&gt; Requests Payment Lock</a:t>
             </a:r>
@@ -3858,7 +4283,7 @@
           </a:fontRef>
         </p:style>
         <p:txBody>
-          <a:bodyPr rtlCol="0" anchor="ctr" wrap="square"/>
+          <a:bodyPr wrap="square" rtlCol="0" anchor="ctr"/>
           <a:lstStyle/>
           <a:p>
             <a:pPr algn="ctr">
@@ -3874,13 +4299,6 @@
           </a:p>
           <a:p>
             <a:br/>
-            <a:pPr>
-              <a:defRPr sz="1200">
-                <a:solidFill>
-                  <a:srgbClr val="F8FAFC"/>
-                </a:solidFill>
-              </a:defRPr>
-            </a:pPr>
             <a:r>
               <a:t>Terminal Investigation:</a:t>
             </a:r>
@@ -3949,7 +4367,7 @@
           </a:fontRef>
         </p:style>
         <p:txBody>
-          <a:bodyPr rtlCol="0" anchor="ctr" wrap="square"/>
+          <a:bodyPr wrap="square" rtlCol="0" anchor="ctr"/>
           <a:lstStyle/>
           <a:p>
             <a:pPr algn="ctr">
@@ -3974,7 +4392,7 @@
 </file>
 
 <file path=ppt/slides/slide12.xml><?xml version="1.0" encoding="utf-8"?>
-<p:sld xmlns:a="http://schemas.openxmlformats.org/drawingml/2006/main" xmlns:p="http://schemas.openxmlformats.org/presentationml/2006/main" xmlns:r="http://schemas.openxmlformats.org/officeDocument/2006/relationships">
+<p:sld xmlns:a="http://schemas.openxmlformats.org/drawingml/2006/main" xmlns:r="http://schemas.openxmlformats.org/officeDocument/2006/relationships" xmlns:p="http://schemas.openxmlformats.org/presentationml/2006/main">
   <p:cSld>
     <p:spTree>
       <p:nvGrpSpPr>
@@ -3982,7 +4400,14 @@
         <p:cNvGrpSpPr/>
         <p:nvPr/>
       </p:nvGrpSpPr>
-      <p:grpSpPr/>
+      <p:grpSpPr>
+        <a:xfrm>
+          <a:off x="0" y="0"/>
+          <a:ext cx="0" cy="0"/>
+          <a:chOff x="0" y="0"/>
+          <a:chExt cx="0" cy="0"/>
+        </a:xfrm>
+      </p:grpSpPr>
       <p:sp>
         <p:nvSpPr>
           <p:cNvPr id="2" name="Rectangle 1"/>
@@ -4023,6 +4448,7 @@
           <a:lstStyle/>
           <a:p>
             <a:pPr algn="ctr"/>
+            <a:endParaRPr/>
           </a:p>
         </p:txBody>
       </p:sp>
@@ -4146,7 +4572,7 @@
           </a:fontRef>
         </p:style>
         <p:txBody>
-          <a:bodyPr rtlCol="0" anchor="ctr" wrap="square"/>
+          <a:bodyPr wrap="square" rtlCol="0" anchor="ctr"/>
           <a:lstStyle/>
           <a:p>
             <a:pPr algn="ctr">
@@ -4162,13 +4588,6 @@
           </a:p>
           <a:p>
             <a:br/>
-            <a:pPr>
-              <a:defRPr sz="1200">
-                <a:solidFill>
-                  <a:srgbClr val="F8FAFC"/>
-                </a:solidFill>
-              </a:defRPr>
-            </a:pPr>
             <a:r>
               <a:t>• 'Primitives are pass-by-value, objects are pass-by-reference.'</a:t>
             </a:r>
@@ -4225,7 +4644,7 @@
           </a:fontRef>
         </p:style>
         <p:txBody>
-          <a:bodyPr rtlCol="0" anchor="ctr" wrap="square"/>
+          <a:bodyPr wrap="square" rtlCol="0" anchor="ctr"/>
           <a:lstStyle/>
           <a:p>
             <a:pPr algn="ctr">
@@ -4241,13 +4660,6 @@
           </a:p>
           <a:p>
             <a:br/>
-            <a:pPr>
-              <a:defRPr sz="1200">
-                <a:solidFill>
-                  <a:srgbClr val="F8FAFC"/>
-                </a:solidFill>
-              </a:defRPr>
-            </a:pPr>
             <a:r>
               <a:t>• 'Java is always pass-by-value; for objects, the value is the 64-bit Heap address pointer.'</a:t>
             </a:r>
@@ -4298,7 +4710,7 @@
           </a:fontRef>
         </p:style>
         <p:txBody>
-          <a:bodyPr rtlCol="0" anchor="ctr" wrap="square"/>
+          <a:bodyPr wrap="square" rtlCol="0" anchor="ctr"/>
           <a:lstStyle/>
           <a:p>
             <a:pPr algn="ctr">
@@ -4323,7 +4735,7 @@
 </file>
 
 <file path=ppt/slides/slide2.xml><?xml version="1.0" encoding="utf-8"?>
-<p:sld xmlns:a="http://schemas.openxmlformats.org/drawingml/2006/main" xmlns:p="http://schemas.openxmlformats.org/presentationml/2006/main" xmlns:r="http://schemas.openxmlformats.org/officeDocument/2006/relationships">
+<p:sld xmlns:a="http://schemas.openxmlformats.org/drawingml/2006/main" xmlns:r="http://schemas.openxmlformats.org/officeDocument/2006/relationships" xmlns:p="http://schemas.openxmlformats.org/presentationml/2006/main">
   <p:cSld>
     <p:spTree>
       <p:nvGrpSpPr>
@@ -4331,7 +4743,14 @@
         <p:cNvGrpSpPr/>
         <p:nvPr/>
       </p:nvGrpSpPr>
-      <p:grpSpPr/>
+      <p:grpSpPr>
+        <a:xfrm>
+          <a:off x="0" y="0"/>
+          <a:ext cx="0" cy="0"/>
+          <a:chOff x="0" y="0"/>
+          <a:chExt cx="0" cy="0"/>
+        </a:xfrm>
+      </p:grpSpPr>
       <p:sp>
         <p:nvSpPr>
           <p:cNvPr id="2" name="Rectangle 1"/>
@@ -4372,6 +4791,7 @@
           <a:lstStyle/>
           <a:p>
             <a:pPr algn="ctr"/>
+            <a:endParaRPr/>
           </a:p>
         </p:txBody>
       </p:sp>
@@ -4495,7 +4915,7 @@
           </a:fontRef>
         </p:style>
         <p:txBody>
-          <a:bodyPr rtlCol="0" anchor="ctr" wrap="square"/>
+          <a:bodyPr wrap="square" rtlCol="0" anchor="ctr"/>
           <a:lstStyle/>
           <a:p>
             <a:pPr algn="ctr">
@@ -4506,41 +4926,73 @@
               </a:defRPr>
             </a:pPr>
             <a:r>
+              <a:rPr dirty="0"/>
               <a:t>🔴 JavaScript: Deferred Runtime Explosions</a:t>
             </a:r>
           </a:p>
           <a:p>
-            <a:br/>
-            <a:pPr>
-              <a:defRPr sz="1200">
-                <a:solidFill>
-                  <a:srgbClr val="F8FAFC"/>
-                </a:solidFill>
-              </a:defRPr>
-            </a:pPr>
-            <a:r>
+            <a:br>
+              <a:rPr dirty="0"/>
+            </a:br>
+            <a:r>
+              <a:rPr dirty="0"/>
               <a:t>let account = { id: 'SG-101', balance: 500 };</a:t>
             </a:r>
-            <a:br/>
-            <a:r>
-              <a:t>console.log(account.balence.toFixed(2));</a:t>
-            </a:r>
-            <a:br/>
-            <a:br/>
-            <a:r>
+            <a:br>
+              <a:rPr dirty="0"/>
+            </a:br>
+            <a:r>
+              <a:rPr dirty="0" err="1"/>
+              <a:t>console.log</a:t>
+            </a:r>
+            <a:r>
+              <a:rPr dirty="0"/>
+              <a:t>(</a:t>
+            </a:r>
+            <a:r>
+              <a:rPr dirty="0" err="1"/>
+              <a:t>account.balence.toFixed</a:t>
+            </a:r>
+            <a:r>
+              <a:rPr dirty="0"/>
+              <a:t>(2));</a:t>
+            </a:r>
+            <a:br>
+              <a:rPr dirty="0"/>
+            </a:br>
+            <a:br>
+              <a:rPr dirty="0"/>
+            </a:br>
+            <a:r>
+              <a:rPr dirty="0"/>
               <a:t>Live Customer Production Crash:</a:t>
             </a:r>
-            <a:br/>
-            <a:r>
-              <a:t>TypeError: Cannot read properties of undefined</a:t>
-            </a:r>
-            <a:br/>
-            <a:br/>
-            <a:r>
+            <a:br>
+              <a:rPr dirty="0"/>
+            </a:br>
+            <a:r>
+              <a:rPr dirty="0" err="1"/>
+              <a:t>TypeError</a:t>
+            </a:r>
+            <a:r>
+              <a:rPr dirty="0"/>
+              <a:t>: Cannot read properties of undefined</a:t>
+            </a:r>
+            <a:br>
+              <a:rPr dirty="0"/>
+            </a:br>
+            <a:br>
+              <a:rPr dirty="0"/>
+            </a:br>
+            <a:r>
+              <a:rPr dirty="0"/>
               <a:t>• Dynamic typing postpones checks until execution.</a:t>
             </a:r>
-            <a:br/>
-            <a:r>
+            <a:br>
+              <a:rPr dirty="0"/>
+            </a:br>
+            <a:r>
+              <a:rPr dirty="0"/>
               <a:t>• Silent coercion and member typos crash during customer transactions at 3 AM.</a:t>
             </a:r>
           </a:p>
@@ -4584,7 +5036,7 @@
           </a:fontRef>
         </p:style>
         <p:txBody>
-          <a:bodyPr rtlCol="0" anchor="ctr" wrap="square"/>
+          <a:bodyPr wrap="square" rtlCol="0" anchor="ctr"/>
           <a:lstStyle/>
           <a:p>
             <a:pPr algn="ctr">
@@ -4595,41 +5047,93 @@
               </a:defRPr>
             </a:pPr>
             <a:r>
+              <a:rPr dirty="0"/>
               <a:t>🟢 Java: Compile-Time Verification</a:t>
             </a:r>
           </a:p>
           <a:p>
-            <a:br/>
-            <a:pPr>
-              <a:defRPr sz="1200">
-                <a:solidFill>
-                  <a:srgbClr val="F8FAFC"/>
-                </a:solidFill>
-              </a:defRPr>
-            </a:pPr>
-            <a:r>
+            <a:br>
+              <a:rPr dirty="0"/>
+            </a:br>
+            <a:r>
+              <a:rPr dirty="0"/>
               <a:t>Account acc = new Account('SG-101', 500.0);</a:t>
             </a:r>
-            <a:br/>
-            <a:r>
-              <a:t>System.out.println(acc.balence);</a:t>
-            </a:r>
-            <a:br/>
-            <a:br/>
-            <a:r>
-              <a:t>Compiler Output (javac):</a:t>
-            </a:r>
-            <a:br/>
-            <a:r>
-              <a:t>error: cannot find symbol 'balence'</a:t>
-            </a:r>
-            <a:br/>
-            <a:br/>
-            <a:r>
-              <a:t>• javac verifies types and method signatures before emitting .class bytecode.</a:t>
-            </a:r>
-            <a:br/>
-            <a:r>
+            <a:br>
+              <a:rPr dirty="0"/>
+            </a:br>
+            <a:r>
+              <a:rPr dirty="0" err="1"/>
+              <a:t>System.out.println</a:t>
+            </a:r>
+            <a:r>
+              <a:rPr dirty="0"/>
+              <a:t>(</a:t>
+            </a:r>
+            <a:r>
+              <a:rPr dirty="0" err="1"/>
+              <a:t>acc.balence</a:t>
+            </a:r>
+            <a:r>
+              <a:rPr dirty="0"/>
+              <a:t>);</a:t>
+            </a:r>
+            <a:br>
+              <a:rPr dirty="0"/>
+            </a:br>
+            <a:br>
+              <a:rPr dirty="0"/>
+            </a:br>
+            <a:r>
+              <a:rPr dirty="0"/>
+              <a:t>Compiler Output (</a:t>
+            </a:r>
+            <a:r>
+              <a:rPr dirty="0" err="1"/>
+              <a:t>javac</a:t>
+            </a:r>
+            <a:r>
+              <a:rPr dirty="0"/>
+              <a:t>):</a:t>
+            </a:r>
+            <a:br>
+              <a:rPr dirty="0"/>
+            </a:br>
+            <a:r>
+              <a:rPr dirty="0"/>
+              <a:t>error: cannot find symbol '</a:t>
+            </a:r>
+            <a:r>
+              <a:rPr dirty="0" err="1"/>
+              <a:t>balence</a:t>
+            </a:r>
+            <a:r>
+              <a:rPr dirty="0"/>
+              <a:t>'</a:t>
+            </a:r>
+            <a:br>
+              <a:rPr dirty="0"/>
+            </a:br>
+            <a:br>
+              <a:rPr dirty="0"/>
+            </a:br>
+            <a:r>
+              <a:rPr dirty="0"/>
+              <a:t>• </a:t>
+            </a:r>
+            <a:r>
+              <a:rPr dirty="0" err="1"/>
+              <a:t>javac</a:t>
+            </a:r>
+            <a:r>
+              <a:rPr dirty="0"/>
+              <a:t> verifies types and method signatures before emitting .class bytecode.</a:t>
+            </a:r>
+            <a:br>
+              <a:rPr dirty="0"/>
+            </a:br>
+            <a:r>
+              <a:rPr dirty="0"/>
               <a:t>• Eliminates entire classes of production crashes before deployment.</a:t>
             </a:r>
           </a:p>
@@ -4671,7 +5175,7 @@
           </a:fontRef>
         </p:style>
         <p:txBody>
-          <a:bodyPr rtlCol="0" anchor="ctr" wrap="square"/>
+          <a:bodyPr wrap="square" rtlCol="0" anchor="ctr"/>
           <a:lstStyle/>
           <a:p>
             <a:pPr algn="ctr">
@@ -4696,7 +5200,7 @@
 </file>
 
 <file path=ppt/slides/slide3.xml><?xml version="1.0" encoding="utf-8"?>
-<p:sld xmlns:a="http://schemas.openxmlformats.org/drawingml/2006/main" xmlns:p="http://schemas.openxmlformats.org/presentationml/2006/main" xmlns:r="http://schemas.openxmlformats.org/officeDocument/2006/relationships">
+<p:sld xmlns:a="http://schemas.openxmlformats.org/drawingml/2006/main" xmlns:r="http://schemas.openxmlformats.org/officeDocument/2006/relationships" xmlns:p="http://schemas.openxmlformats.org/presentationml/2006/main">
   <p:cSld>
     <p:spTree>
       <p:nvGrpSpPr>
@@ -4704,7 +5208,14 @@
         <p:cNvGrpSpPr/>
         <p:nvPr/>
       </p:nvGrpSpPr>
-      <p:grpSpPr/>
+      <p:grpSpPr>
+        <a:xfrm>
+          <a:off x="0" y="0"/>
+          <a:ext cx="0" cy="0"/>
+          <a:chOff x="0" y="0"/>
+          <a:chExt cx="0" cy="0"/>
+        </a:xfrm>
+      </p:grpSpPr>
       <p:sp>
         <p:nvSpPr>
           <p:cNvPr id="2" name="Rectangle 1"/>
@@ -4745,6 +5256,7 @@
           <a:lstStyle/>
           <a:p>
             <a:pPr algn="ctr"/>
+            <a:endParaRPr/>
           </a:p>
         </p:txBody>
       </p:sp>
@@ -4868,7 +5380,7 @@
           </a:fontRef>
         </p:style>
         <p:txBody>
-          <a:bodyPr rtlCol="0" anchor="ctr" wrap="square"/>
+          <a:bodyPr wrap="square" rtlCol="0" anchor="ctr"/>
           <a:lstStyle/>
           <a:p>
             <a:pPr algn="ctr">
@@ -4879,37 +5391,51 @@
               </a:defRPr>
             </a:pPr>
             <a:r>
+              <a:rPr dirty="0"/>
               <a:t>⚡ The Thread Stack (Your Private Workbench)</a:t>
             </a:r>
           </a:p>
           <a:p>
-            <a:br/>
-            <a:pPr>
-              <a:defRPr sz="1200">
-                <a:solidFill>
-                  <a:srgbClr val="F8FAFC"/>
-                </a:solidFill>
-              </a:defRPr>
-            </a:pPr>
-            <a:r>
+            <a:br>
+              <a:rPr dirty="0"/>
+            </a:br>
+            <a:r>
+              <a:rPr dirty="0"/>
               <a:t>• Thread-Private: Dedicated memory for each thread.</a:t>
             </a:r>
-            <a:br/>
-            <a:r>
+            <a:br>
+              <a:rPr dirty="0"/>
+            </a:br>
+            <a:r>
+              <a:rPr dirty="0"/>
               <a:t>• Extremely Fast: Managed directly via CPU stack pointer.</a:t>
             </a:r>
-            <a:br/>
-            <a:r>
+            <a:br>
+              <a:rPr dirty="0"/>
+            </a:br>
+            <a:r>
+              <a:rPr dirty="0"/>
               <a:t>• Stack Frame Lifecycle: Pushes when a method is called; pops automatically upon return.</a:t>
             </a:r>
-            <a:br/>
-            <a:r>
-              <a:t>• Stores: Local primitive values (int, double, boolean).</a:t>
-            </a:r>
-            <a:br/>
-            <a:r>
-              <a:t>• Stores: Reference pointers (64-bit memory addresses pointing to the Heap).</a:t>
-            </a:r>
+            <a:br>
+              <a:rPr dirty="0"/>
+            </a:br>
+            <a:r>
+              <a:rPr dirty="0"/>
+              <a:t>• Stores: Local primitive values (int, double, </a:t>
+            </a:r>
+            <a:r>
+              <a:rPr dirty="0" err="1"/>
+              <a:t>boolean</a:t>
+            </a:r>
+            <a:r>
+              <a:rPr dirty="0"/>
+              <a:t>).</a:t>
+            </a:r>
+            <a:br>
+              <a:rPr dirty="0"/>
+            </a:br>
+            <a:endParaRPr dirty="0"/>
           </a:p>
         </p:txBody>
       </p:sp>
@@ -4951,7 +5477,7 @@
           </a:fontRef>
         </p:style>
         <p:txBody>
-          <a:bodyPr rtlCol="0" anchor="ctr" wrap="square"/>
+          <a:bodyPr wrap="square" rtlCol="0" anchor="ctr"/>
           <a:lstStyle/>
           <a:p>
             <a:pPr algn="ctr">
@@ -4962,37 +5488,54 @@
               </a:defRPr>
             </a:pPr>
             <a:r>
+              <a:rPr dirty="0"/>
               <a:t>🏢 The Shared Heap (The Warehouse)</a:t>
             </a:r>
           </a:p>
           <a:p>
-            <a:br/>
-            <a:pPr>
-              <a:defRPr sz="1200">
-                <a:solidFill>
-                  <a:srgbClr val="F8FAFC"/>
-                </a:solidFill>
-              </a:defRPr>
-            </a:pPr>
-            <a:r>
+            <a:br>
+              <a:rPr dirty="0"/>
+            </a:br>
+            <a:r>
+              <a:rPr dirty="0"/>
               <a:t>• Shared Storage: Accessible by all running threads.</a:t>
             </a:r>
-            <a:br/>
-            <a:r>
+            <a:br>
+              <a:rPr dirty="0"/>
+            </a:br>
+            <a:r>
+              <a:rPr dirty="0"/>
               <a:t>• Object House: Stores all class instances and arrays instantiated via 'new'.</a:t>
             </a:r>
-            <a:br/>
-            <a:r>
+            <a:br>
+              <a:rPr dirty="0"/>
+            </a:br>
+            <a:r>
+              <a:rPr dirty="0"/>
               <a:t>• Persistence: Objects live as long as an active thread holds a pointer to them.</a:t>
             </a:r>
-            <a:br/>
-            <a:r>
+            <a:br>
+              <a:rPr dirty="0"/>
+            </a:br>
+            <a:r>
+              <a:rPr dirty="0"/>
               <a:t>• Garbage Collector: Asynchronously reclaims unreferenced memory.</a:t>
             </a:r>
-            <a:br/>
-            <a:r>
+            <a:br>
+              <a:rPr dirty="0"/>
+            </a:br>
+            <a:r>
+              <a:rPr dirty="0"/>
               <a:t>• Memory Leaks: Retaining unneeded references prevents GC cleanup.</a:t>
             </a:r>
+            <a:endParaRPr lang="en-US" dirty="0"/>
+          </a:p>
+          <a:p>
+            <a:r>
+              <a:rPr lang="en-IN"/>
+              <a:t>• Stores: Reference pointers (64-bit memory addresses pointing to the Heap).</a:t>
+            </a:r>
+            <a:endParaRPr dirty="0"/>
           </a:p>
         </p:txBody>
       </p:sp>
@@ -5032,7 +5575,7 @@
           </a:fontRef>
         </p:style>
         <p:txBody>
-          <a:bodyPr rtlCol="0" anchor="ctr" wrap="square"/>
+          <a:bodyPr wrap="square" rtlCol="0" anchor="ctr"/>
           <a:lstStyle/>
           <a:p>
             <a:pPr algn="ctr">
@@ -5057,7 +5600,7 @@
 </file>
 
 <file path=ppt/slides/slide4.xml><?xml version="1.0" encoding="utf-8"?>
-<p:sld xmlns:a="http://schemas.openxmlformats.org/drawingml/2006/main" xmlns:p="http://schemas.openxmlformats.org/presentationml/2006/main" xmlns:r="http://schemas.openxmlformats.org/officeDocument/2006/relationships">
+<p:sld xmlns:a="http://schemas.openxmlformats.org/drawingml/2006/main" xmlns:r="http://schemas.openxmlformats.org/officeDocument/2006/relationships" xmlns:p="http://schemas.openxmlformats.org/presentationml/2006/main">
   <p:cSld>
     <p:spTree>
       <p:nvGrpSpPr>
@@ -5065,7 +5608,14 @@
         <p:cNvGrpSpPr/>
         <p:nvPr/>
       </p:nvGrpSpPr>
-      <p:grpSpPr/>
+      <p:grpSpPr>
+        <a:xfrm>
+          <a:off x="0" y="0"/>
+          <a:ext cx="0" cy="0"/>
+          <a:chOff x="0" y="0"/>
+          <a:chExt cx="0" cy="0"/>
+        </a:xfrm>
+      </p:grpSpPr>
       <p:sp>
         <p:nvSpPr>
           <p:cNvPr id="2" name="Rectangle 1"/>
@@ -5106,6 +5656,7 @@
           <a:lstStyle/>
           <a:p>
             <a:pPr algn="ctr"/>
+            <a:endParaRPr/>
           </a:p>
         </p:txBody>
       </p:sp>
@@ -5229,7 +5780,7 @@
           </a:fontRef>
         </p:style>
         <p:txBody>
-          <a:bodyPr rtlCol="0" anchor="ctr" wrap="square"/>
+          <a:bodyPr wrap="square" rtlCol="0" anchor="ctr"/>
           <a:lstStyle/>
           <a:p>
             <a:pPr algn="ctr">
@@ -5245,13 +5796,6 @@
           </a:p>
           <a:p>
             <a:br/>
-            <a:pPr>
-              <a:defRPr sz="1200">
-                <a:solidFill>
-                  <a:srgbClr val="F8FAFC"/>
-                </a:solidFill>
-              </a:defRPr>
-            </a:pPr>
             <a:r>
               <a:t>double balance = 500.0;</a:t>
             </a:r>
@@ -5326,7 +5870,7 @@
           </a:fontRef>
         </p:style>
         <p:txBody>
-          <a:bodyPr rtlCol="0" anchor="ctr" wrap="square"/>
+          <a:bodyPr wrap="square" rtlCol="0" anchor="ctr"/>
           <a:lstStyle/>
           <a:p>
             <a:pPr algn="ctr">
@@ -5342,13 +5886,6 @@
           </a:p>
           <a:p>
             <a:br/>
-            <a:pPr>
-              <a:defRPr sz="1200">
-                <a:solidFill>
-                  <a:srgbClr val="F8FAFC"/>
-                </a:solidFill>
-              </a:defRPr>
-            </a:pPr>
             <a:r>
               <a:t>balance = applyFeeFixed(balance, 50.0);</a:t>
             </a:r>
@@ -5421,7 +5958,7 @@
           </a:fontRef>
         </p:style>
         <p:txBody>
-          <a:bodyPr rtlCol="0" anchor="ctr" wrap="square"/>
+          <a:bodyPr wrap="square" rtlCol="0" anchor="ctr"/>
           <a:lstStyle/>
           <a:p>
             <a:pPr algn="ctr">
@@ -5446,7 +5983,7 @@
 </file>
 
 <file path=ppt/slides/slide5.xml><?xml version="1.0" encoding="utf-8"?>
-<p:sld xmlns:a="http://schemas.openxmlformats.org/drawingml/2006/main" xmlns:p="http://schemas.openxmlformats.org/presentationml/2006/main" xmlns:r="http://schemas.openxmlformats.org/officeDocument/2006/relationships">
+<p:sld xmlns:a="http://schemas.openxmlformats.org/drawingml/2006/main" xmlns:r="http://schemas.openxmlformats.org/officeDocument/2006/relationships" xmlns:p="http://schemas.openxmlformats.org/presentationml/2006/main">
   <p:cSld>
     <p:spTree>
       <p:nvGrpSpPr>
@@ -5454,7 +5991,14 @@
         <p:cNvGrpSpPr/>
         <p:nvPr/>
       </p:nvGrpSpPr>
-      <p:grpSpPr/>
+      <p:grpSpPr>
+        <a:xfrm>
+          <a:off x="0" y="0"/>
+          <a:ext cx="0" cy="0"/>
+          <a:chOff x="0" y="0"/>
+          <a:chExt cx="0" cy="0"/>
+        </a:xfrm>
+      </p:grpSpPr>
       <p:sp>
         <p:nvSpPr>
           <p:cNvPr id="2" name="Rectangle 1"/>
@@ -5495,6 +6039,7 @@
           <a:lstStyle/>
           <a:p>
             <a:pPr algn="ctr"/>
+            <a:endParaRPr/>
           </a:p>
         </p:txBody>
       </p:sp>
@@ -5618,7 +6163,7 @@
           </a:fontRef>
         </p:style>
         <p:txBody>
-          <a:bodyPr rtlCol="0" anchor="ctr" wrap="square"/>
+          <a:bodyPr wrap="square" rtlCol="0" anchor="ctr"/>
           <a:lstStyle/>
           <a:p>
             <a:pPr algn="ctr">
@@ -5634,13 +6179,6 @@
           </a:p>
           <a:p>
             <a:br/>
-            <a:pPr>
-              <a:defRPr sz="1200">
-                <a:solidFill>
-                  <a:srgbClr val="F8FAFC"/>
-                </a:solidFill>
-              </a:defRPr>
-            </a:pPr>
             <a:r>
               <a:t>void upgradeAccountBroken(Account acc) {</a:t>
             </a:r>
@@ -5710,7 +6248,7 @@
           </a:fontRef>
         </p:style>
         <p:txBody>
-          <a:bodyPr rtlCol="0" anchor="ctr" wrap="square"/>
+          <a:bodyPr wrap="square" rtlCol="0" anchor="ctr"/>
           <a:lstStyle/>
           <a:p>
             <a:pPr algn="ctr">
@@ -5726,13 +6264,6 @@
           </a:p>
           <a:p>
             <a:br/>
-            <a:pPr>
-              <a:defRPr sz="1200">
-                <a:solidFill>
-                  <a:srgbClr val="F8FAFC"/>
-                </a:solidFill>
-              </a:defRPr>
-            </a:pPr>
             <a:r>
               <a:t>primaryAccount = upgradeAccountFixed(primaryAccount);</a:t>
             </a:r>
@@ -5797,7 +6328,7 @@
           </a:fontRef>
         </p:style>
         <p:txBody>
-          <a:bodyPr rtlCol="0" anchor="ctr" wrap="square"/>
+          <a:bodyPr wrap="square" rtlCol="0" anchor="ctr"/>
           <a:lstStyle/>
           <a:p>
             <a:pPr algn="ctr">
@@ -5822,7 +6353,7 @@
 </file>
 
 <file path=ppt/slides/slide6.xml><?xml version="1.0" encoding="utf-8"?>
-<p:sld xmlns:a="http://schemas.openxmlformats.org/drawingml/2006/main" xmlns:p="http://schemas.openxmlformats.org/presentationml/2006/main" xmlns:r="http://schemas.openxmlformats.org/officeDocument/2006/relationships">
+<p:sld xmlns:a="http://schemas.openxmlformats.org/drawingml/2006/main" xmlns:r="http://schemas.openxmlformats.org/officeDocument/2006/relationships" xmlns:p="http://schemas.openxmlformats.org/presentationml/2006/main">
   <p:cSld>
     <p:spTree>
       <p:nvGrpSpPr>
@@ -5830,7 +6361,14 @@
         <p:cNvGrpSpPr/>
         <p:nvPr/>
       </p:nvGrpSpPr>
-      <p:grpSpPr/>
+      <p:grpSpPr>
+        <a:xfrm>
+          <a:off x="0" y="0"/>
+          <a:ext cx="0" cy="0"/>
+          <a:chOff x="0" y="0"/>
+          <a:chExt cx="0" cy="0"/>
+        </a:xfrm>
+      </p:grpSpPr>
       <p:sp>
         <p:nvSpPr>
           <p:cNvPr id="2" name="Rectangle 1"/>
@@ -5871,6 +6409,7 @@
           <a:lstStyle/>
           <a:p>
             <a:pPr algn="ctr"/>
+            <a:endParaRPr/>
           </a:p>
         </p:txBody>
       </p:sp>
@@ -5994,7 +6533,7 @@
           </a:fontRef>
         </p:style>
         <p:txBody>
-          <a:bodyPr rtlCol="0" anchor="ctr" wrap="square"/>
+          <a:bodyPr wrap="square" rtlCol="0" anchor="ctr"/>
           <a:lstStyle/>
           <a:p>
             <a:pPr algn="ctr">
@@ -6010,13 +6549,6 @@
           </a:p>
           <a:p>
             <a:br/>
-            <a:pPr>
-              <a:defRPr sz="1200">
-                <a:solidFill>
-                  <a:srgbClr val="F8FAFC"/>
-                </a:solidFill>
-              </a:defRPr>
-            </a:pPr>
             <a:r>
               <a:t>public class BankAccountBroken {</a:t>
             </a:r>
@@ -6087,7 +6619,7 @@
           </a:fontRef>
         </p:style>
         <p:txBody>
-          <a:bodyPr rtlCol="0" anchor="ctr" wrap="square"/>
+          <a:bodyPr wrap="square" rtlCol="0" anchor="ctr"/>
           <a:lstStyle/>
           <a:p>
             <a:pPr algn="ctr">
@@ -6103,13 +6635,6 @@
           </a:p>
           <a:p>
             <a:br/>
-            <a:pPr>
-              <a:defRPr sz="1200">
-                <a:solidFill>
-                  <a:srgbClr val="F8FAFC"/>
-                </a:solidFill>
-              </a:defRPr>
-            </a:pPr>
             <a:r>
               <a:t>public class BankAccountFixed {</a:t>
             </a:r>
@@ -6185,7 +6710,7 @@
           </a:fontRef>
         </p:style>
         <p:txBody>
-          <a:bodyPr rtlCol="0" anchor="ctr" wrap="square"/>
+          <a:bodyPr wrap="square" rtlCol="0" anchor="ctr"/>
           <a:lstStyle/>
           <a:p>
             <a:pPr algn="ctr">
@@ -6210,7 +6735,7 @@
 </file>
 
 <file path=ppt/slides/slide7.xml><?xml version="1.0" encoding="utf-8"?>
-<p:sld xmlns:a="http://schemas.openxmlformats.org/drawingml/2006/main" xmlns:p="http://schemas.openxmlformats.org/presentationml/2006/main" xmlns:r="http://schemas.openxmlformats.org/officeDocument/2006/relationships">
+<p:sld xmlns:a="http://schemas.openxmlformats.org/drawingml/2006/main" xmlns:r="http://schemas.openxmlformats.org/officeDocument/2006/relationships" xmlns:p="http://schemas.openxmlformats.org/presentationml/2006/main">
   <p:cSld>
     <p:spTree>
       <p:nvGrpSpPr>
@@ -6218,7 +6743,14 @@
         <p:cNvGrpSpPr/>
         <p:nvPr/>
       </p:nvGrpSpPr>
-      <p:grpSpPr/>
+      <p:grpSpPr>
+        <a:xfrm>
+          <a:off x="0" y="0"/>
+          <a:ext cx="0" cy="0"/>
+          <a:chOff x="0" y="0"/>
+          <a:chExt cx="0" cy="0"/>
+        </a:xfrm>
+      </p:grpSpPr>
       <p:sp>
         <p:nvSpPr>
           <p:cNvPr id="2" name="Rectangle 1"/>
@@ -6259,6 +6791,7 @@
           <a:lstStyle/>
           <a:p>
             <a:pPr algn="ctr"/>
+            <a:endParaRPr/>
           </a:p>
         </p:txBody>
       </p:sp>
@@ -6382,7 +6915,7 @@
           </a:fontRef>
         </p:style>
         <p:txBody>
-          <a:bodyPr rtlCol="0" anchor="ctr" wrap="square"/>
+          <a:bodyPr wrap="square" rtlCol="0" anchor="ctr"/>
           <a:lstStyle/>
           <a:p>
             <a:pPr algn="ctr">
@@ -6398,13 +6931,6 @@
           </a:p>
           <a:p>
             <a:br/>
-            <a:pPr>
-              <a:defRPr sz="1200">
-                <a:solidFill>
-                  <a:srgbClr val="F8FAFC"/>
-                </a:solidFill>
-              </a:defRPr>
-            </a:pPr>
             <a:r>
               <a:t>class NormalMemberBroken extends Member {</a:t>
             </a:r>
@@ -6478,7 +7004,7 @@
           </a:fontRef>
         </p:style>
         <p:txBody>
-          <a:bodyPr rtlCol="0" anchor="ctr" wrap="square"/>
+          <a:bodyPr wrap="square" rtlCol="0" anchor="ctr"/>
           <a:lstStyle/>
           <a:p>
             <a:pPr algn="ctr">
@@ -6494,13 +7020,6 @@
           </a:p>
           <a:p>
             <a:br/>
-            <a:pPr>
-              <a:defRPr sz="1200">
-                <a:solidFill>
-                  <a:srgbClr val="F8FAFC"/>
-                </a:solidFill>
-              </a:defRPr>
-            </a:pPr>
             <a:r>
               <a:t>class VIPMemberFixed extends Member {</a:t>
             </a:r>
@@ -6575,7 +7094,7 @@
           </a:fontRef>
         </p:style>
         <p:txBody>
-          <a:bodyPr rtlCol="0" anchor="ctr" wrap="square"/>
+          <a:bodyPr wrap="square" rtlCol="0" anchor="ctr"/>
           <a:lstStyle/>
           <a:p>
             <a:pPr algn="ctr">
@@ -6600,7 +7119,7 @@
 </file>
 
 <file path=ppt/slides/slide8.xml><?xml version="1.0" encoding="utf-8"?>
-<p:sld xmlns:a="http://schemas.openxmlformats.org/drawingml/2006/main" xmlns:p="http://schemas.openxmlformats.org/presentationml/2006/main" xmlns:r="http://schemas.openxmlformats.org/officeDocument/2006/relationships">
+<p:sld xmlns:a="http://schemas.openxmlformats.org/drawingml/2006/main" xmlns:r="http://schemas.openxmlformats.org/officeDocument/2006/relationships" xmlns:p="http://schemas.openxmlformats.org/presentationml/2006/main">
   <p:cSld>
     <p:spTree>
       <p:nvGrpSpPr>
@@ -6608,7 +7127,14 @@
         <p:cNvGrpSpPr/>
         <p:nvPr/>
       </p:nvGrpSpPr>
-      <p:grpSpPr/>
+      <p:grpSpPr>
+        <a:xfrm>
+          <a:off x="0" y="0"/>
+          <a:ext cx="0" cy="0"/>
+          <a:chOff x="0" y="0"/>
+          <a:chExt cx="0" cy="0"/>
+        </a:xfrm>
+      </p:grpSpPr>
       <p:sp>
         <p:nvSpPr>
           <p:cNvPr id="2" name="Rectangle 1"/>
@@ -6649,6 +7175,7 @@
           <a:lstStyle/>
           <a:p>
             <a:pPr algn="ctr"/>
+            <a:endParaRPr/>
           </a:p>
         </p:txBody>
       </p:sp>
@@ -6772,7 +7299,7 @@
           </a:fontRef>
         </p:style>
         <p:txBody>
-          <a:bodyPr rtlCol="0" anchor="ctr" wrap="square"/>
+          <a:bodyPr wrap="square" rtlCol="0" anchor="ctr"/>
           <a:lstStyle/>
           <a:p>
             <a:pPr algn="ctr">
@@ -6788,13 +7315,6 @@
           </a:p>
           <a:p>
             <a:br/>
-            <a:pPr>
-              <a:defRPr sz="1200">
-                <a:solidFill>
-                  <a:srgbClr val="F8FAFC"/>
-                </a:solidFill>
-              </a:defRPr>
-            </a:pPr>
             <a:r>
               <a:t>ArrayList rawCart = new ArrayList();</a:t>
             </a:r>
@@ -6865,7 +7385,7 @@
           </a:fontRef>
         </p:style>
         <p:txBody>
-          <a:bodyPr rtlCol="0" anchor="ctr" wrap="square"/>
+          <a:bodyPr wrap="square" rtlCol="0" anchor="ctr"/>
           <a:lstStyle/>
           <a:p>
             <a:pPr algn="ctr">
@@ -6881,13 +7401,6 @@
           </a:p>
           <a:p>
             <a:br/>
-            <a:pPr>
-              <a:defRPr sz="1200">
-                <a:solidFill>
-                  <a:srgbClr val="F8FAFC"/>
-                </a:solidFill>
-              </a:defRPr>
-            </a:pPr>
             <a:r>
               <a:t>public interface Payable { double calculateFinalPrice(); }</a:t>
             </a:r>
@@ -6952,7 +7465,7 @@
           </a:fontRef>
         </p:style>
         <p:txBody>
-          <a:bodyPr rtlCol="0" anchor="ctr" wrap="square"/>
+          <a:bodyPr wrap="square" rtlCol="0" anchor="ctr"/>
           <a:lstStyle/>
           <a:p>
             <a:pPr algn="ctr">
@@ -6977,7 +7490,7 @@
 </file>
 
 <file path=ppt/slides/slide9.xml><?xml version="1.0" encoding="utf-8"?>
-<p:sld xmlns:a="http://schemas.openxmlformats.org/drawingml/2006/main" xmlns:p="http://schemas.openxmlformats.org/presentationml/2006/main" xmlns:r="http://schemas.openxmlformats.org/officeDocument/2006/relationships">
+<p:sld xmlns:a="http://schemas.openxmlformats.org/drawingml/2006/main" xmlns:r="http://schemas.openxmlformats.org/officeDocument/2006/relationships" xmlns:p="http://schemas.openxmlformats.org/presentationml/2006/main">
   <p:cSld>
     <p:spTree>
       <p:nvGrpSpPr>
@@ -6985,7 +7498,14 @@
         <p:cNvGrpSpPr/>
         <p:nvPr/>
       </p:nvGrpSpPr>
-      <p:grpSpPr/>
+      <p:grpSpPr>
+        <a:xfrm>
+          <a:off x="0" y="0"/>
+          <a:ext cx="0" cy="0"/>
+          <a:chOff x="0" y="0"/>
+          <a:chExt cx="0" cy="0"/>
+        </a:xfrm>
+      </p:grpSpPr>
       <p:sp>
         <p:nvSpPr>
           <p:cNvPr id="2" name="Rectangle 1"/>
@@ -7026,6 +7546,7 @@
           <a:lstStyle/>
           <a:p>
             <a:pPr algn="ctr"/>
+            <a:endParaRPr/>
           </a:p>
         </p:txBody>
       </p:sp>
@@ -7149,7 +7670,7 @@
           </a:fontRef>
         </p:style>
         <p:txBody>
-          <a:bodyPr rtlCol="0" anchor="ctr" wrap="square"/>
+          <a:bodyPr wrap="square" rtlCol="0" anchor="ctr"/>
           <a:lstStyle/>
           <a:p>
             <a:pPr algn="ctr">
@@ -7165,13 +7686,6 @@
           </a:p>
           <a:p>
             <a:br/>
-            <a:pPr>
-              <a:defRPr sz="1200">
-                <a:solidFill>
-                  <a:srgbClr val="F8FAFC"/>
-                </a:solidFill>
-              </a:defRPr>
-            </a:pPr>
             <a:r>
               <a:t>• Purpose: Code reuse and shared internal state (fields).</a:t>
             </a:r>
@@ -7240,7 +7754,7 @@
           </a:fontRef>
         </p:style>
         <p:txBody>
-          <a:bodyPr rtlCol="0" anchor="ctr" wrap="square"/>
+          <a:bodyPr wrap="square" rtlCol="0" anchor="ctr"/>
           <a:lstStyle/>
           <a:p>
             <a:pPr algn="ctr">
@@ -7256,13 +7770,6 @@
           </a:p>
           <a:p>
             <a:br/>
-            <a:pPr>
-              <a:defRPr sz="1200">
-                <a:solidFill>
-                  <a:srgbClr val="F8FAFC"/>
-                </a:solidFill>
-              </a:defRPr>
-            </a:pPr>
             <a:r>
               <a:t>• Purpose: Enforces behavioral contracts across unrelated classes.</a:t>
             </a:r>
@@ -7329,7 +7836,7 @@
           </a:fontRef>
         </p:style>
         <p:txBody>
-          <a:bodyPr rtlCol="0" anchor="ctr" wrap="square"/>
+          <a:bodyPr wrap="square" rtlCol="0" anchor="ctr"/>
           <a:lstStyle/>
           <a:p>
             <a:pPr algn="ctr">
@@ -7671,4 +8178,325 @@
   </a:objectDefaults>
   <a:extraClrSchemeLst/>
 </a:theme>
+</file>
+
+<file path=ppt/theme/theme2.xml><?xml version="1.0" encoding="utf-8"?>
+<a:theme xmlns:a="http://schemas.openxmlformats.org/drawingml/2006/main" name="Office Theme">
+  <a:themeElements>
+    <a:clrScheme name="Office">
+      <a:dk1>
+        <a:sysClr val="windowText" lastClr="000000"/>
+      </a:dk1>
+      <a:lt1>
+        <a:sysClr val="window" lastClr="FFFFFF"/>
+      </a:lt1>
+      <a:dk2>
+        <a:srgbClr val="0E2841"/>
+      </a:dk2>
+      <a:lt2>
+        <a:srgbClr val="E8E8E8"/>
+      </a:lt2>
+      <a:accent1>
+        <a:srgbClr val="156082"/>
+      </a:accent1>
+      <a:accent2>
+        <a:srgbClr val="E97132"/>
+      </a:accent2>
+      <a:accent3>
+        <a:srgbClr val="196B24"/>
+      </a:accent3>
+      <a:accent4>
+        <a:srgbClr val="0F9ED5"/>
+      </a:accent4>
+      <a:accent5>
+        <a:srgbClr val="A02B93"/>
+      </a:accent5>
+      <a:accent6>
+        <a:srgbClr val="4EA72E"/>
+      </a:accent6>
+      <a:hlink>
+        <a:srgbClr val="467886"/>
+      </a:hlink>
+      <a:folHlink>
+        <a:srgbClr val="96607D"/>
+      </a:folHlink>
+    </a:clrScheme>
+    <a:fontScheme name="Office">
+      <a:majorFont>
+        <a:latin typeface="Aptos Display" panose="02110004020202020204"/>
+        <a:ea typeface=""/>
+        <a:cs typeface=""/>
+        <a:font script="Jpan" typeface="游ゴシック Light"/>
+        <a:font script="Hang" typeface="맑은 고딕"/>
+        <a:font script="Hans" typeface="等线 Light"/>
+        <a:font script="Hant" typeface="新細明體"/>
+        <a:font script="Arab" typeface="Times New Roman"/>
+        <a:font script="Hebr" typeface="Times New Roman"/>
+        <a:font script="Thai" typeface="Angsana New"/>
+        <a:font script="Ethi" typeface="Nyala"/>
+        <a:font script="Beng" typeface="Vrinda"/>
+        <a:font script="Gujr" typeface="Shruti"/>
+        <a:font script="Khmr" typeface="MoolBoran"/>
+        <a:font script="Knda" typeface="Tunga"/>
+        <a:font script="Guru" typeface="Raavi"/>
+        <a:font script="Cans" typeface="Euphemia"/>
+        <a:font script="Cher" typeface="Plantagenet Cherokee"/>
+        <a:font script="Yiii" typeface="Microsoft Yi Baiti"/>
+        <a:font script="Tibt" typeface="Microsoft Himalaya"/>
+        <a:font script="Thaa" typeface="MV Boli"/>
+        <a:font script="Deva" typeface="Mangal"/>
+        <a:font script="Telu" typeface="Gautami"/>
+        <a:font script="Taml" typeface="Latha"/>
+        <a:font script="Syrc" typeface="Estrangelo Edessa"/>
+        <a:font script="Orya" typeface="Kalinga"/>
+        <a:font script="Mlym" typeface="Kartika"/>
+        <a:font script="Laoo" typeface="DokChampa"/>
+        <a:font script="Sinh" typeface="Iskoola Pota"/>
+        <a:font script="Mong" typeface="Mongolian Baiti"/>
+        <a:font script="Viet" typeface="Times New Roman"/>
+        <a:font script="Uigh" typeface="Microsoft Uighur"/>
+        <a:font script="Geor" typeface="Sylfaen"/>
+        <a:font script="Armn" typeface="Arial"/>
+        <a:font script="Bugi" typeface="Leelawadee UI"/>
+        <a:font script="Bopo" typeface="Microsoft JhengHei"/>
+        <a:font script="Java" typeface="Javanese Text"/>
+        <a:font script="Lisu" typeface="Segoe UI"/>
+        <a:font script="Mymr" typeface="Myanmar Text"/>
+        <a:font script="Nkoo" typeface="Ebrima"/>
+        <a:font script="Olck" typeface="Nirmala UI"/>
+        <a:font script="Osma" typeface="Ebrima"/>
+        <a:font script="Phag" typeface="Phagspa"/>
+        <a:font script="Syrn" typeface="Estrangelo Edessa"/>
+        <a:font script="Syrj" typeface="Estrangelo Edessa"/>
+        <a:font script="Syre" typeface="Estrangelo Edessa"/>
+        <a:font script="Sora" typeface="Nirmala UI"/>
+        <a:font script="Tale" typeface="Microsoft Tai Le"/>
+        <a:font script="Talu" typeface="Microsoft New Tai Lue"/>
+        <a:font script="Tfng" typeface="Ebrima"/>
+      </a:majorFont>
+      <a:minorFont>
+        <a:latin typeface="Aptos" panose="02110004020202020204"/>
+        <a:ea typeface=""/>
+        <a:cs typeface=""/>
+        <a:font script="Jpan" typeface="游ゴシック"/>
+        <a:font script="Hang" typeface="맑은 고딕"/>
+        <a:font script="Hans" typeface="等线"/>
+        <a:font script="Hant" typeface="新細明體"/>
+        <a:font script="Arab" typeface="Arial"/>
+        <a:font script="Hebr" typeface="Arial"/>
+        <a:font script="Thai" typeface="Cordia New"/>
+        <a:font script="Ethi" typeface="Nyala"/>
+        <a:font script="Beng" typeface="Vrinda"/>
+        <a:font script="Gujr" typeface="Shruti"/>
+        <a:font script="Khmr" typeface="DaunPenh"/>
+        <a:font script="Knda" typeface="Tunga"/>
+        <a:font script="Guru" typeface="Raavi"/>
+        <a:font script="Cans" typeface="Euphemia"/>
+        <a:font script="Cher" typeface="Plantagenet Cherokee"/>
+        <a:font script="Yiii" typeface="Microsoft Yi Baiti"/>
+        <a:font script="Tibt" typeface="Microsoft Himalaya"/>
+        <a:font script="Thaa" typeface="MV Boli"/>
+        <a:font script="Deva" typeface="Mangal"/>
+        <a:font script="Telu" typeface="Gautami"/>
+        <a:font script="Taml" typeface="Latha"/>
+        <a:font script="Syrc" typeface="Estrangelo Edessa"/>
+        <a:font script="Orya" typeface="Kalinga"/>
+        <a:font script="Mlym" typeface="Kartika"/>
+        <a:font script="Laoo" typeface="DokChampa"/>
+        <a:font script="Sinh" typeface="Iskoola Pota"/>
+        <a:font script="Mong" typeface="Mongolian Baiti"/>
+        <a:font script="Viet" typeface="Arial"/>
+        <a:font script="Uigh" typeface="Microsoft Uighur"/>
+        <a:font script="Geor" typeface="Sylfaen"/>
+        <a:font script="Armn" typeface="Arial"/>
+        <a:font script="Bugi" typeface="Leelawadee UI"/>
+        <a:font script="Bopo" typeface="Microsoft JhengHei"/>
+        <a:font script="Java" typeface="Javanese Text"/>
+        <a:font script="Lisu" typeface="Segoe UI"/>
+        <a:font script="Mymr" typeface="Myanmar Text"/>
+        <a:font script="Nkoo" typeface="Ebrima"/>
+        <a:font script="Olck" typeface="Nirmala UI"/>
+        <a:font script="Osma" typeface="Ebrima"/>
+        <a:font script="Phag" typeface="Phagspa"/>
+        <a:font script="Syrn" typeface="Estrangelo Edessa"/>
+        <a:font script="Syrj" typeface="Estrangelo Edessa"/>
+        <a:font script="Syre" typeface="Estrangelo Edessa"/>
+        <a:font script="Sora" typeface="Nirmala UI"/>
+        <a:font script="Tale" typeface="Microsoft Tai Le"/>
+        <a:font script="Talu" typeface="Microsoft New Tai Lue"/>
+        <a:font script="Tfng" typeface="Ebrima"/>
+      </a:minorFont>
+    </a:fontScheme>
+    <a:fmtScheme name="Office">
+      <a:fillStyleLst>
+        <a:solidFill>
+          <a:schemeClr val="phClr"/>
+        </a:solidFill>
+        <a:gradFill rotWithShape="1">
+          <a:gsLst>
+            <a:gs pos="0">
+              <a:schemeClr val="phClr">
+                <a:lumMod val="110000"/>
+                <a:satMod val="105000"/>
+                <a:tint val="67000"/>
+              </a:schemeClr>
+            </a:gs>
+            <a:gs pos="50000">
+              <a:schemeClr val="phClr">
+                <a:lumMod val="105000"/>
+                <a:satMod val="103000"/>
+                <a:tint val="73000"/>
+              </a:schemeClr>
+            </a:gs>
+            <a:gs pos="100000">
+              <a:schemeClr val="phClr">
+                <a:lumMod val="105000"/>
+                <a:satMod val="109000"/>
+                <a:tint val="81000"/>
+              </a:schemeClr>
+            </a:gs>
+          </a:gsLst>
+          <a:lin ang="5400000" scaled="0"/>
+        </a:gradFill>
+        <a:gradFill rotWithShape="1">
+          <a:gsLst>
+            <a:gs pos="0">
+              <a:schemeClr val="phClr">
+                <a:satMod val="103000"/>
+                <a:lumMod val="102000"/>
+                <a:tint val="94000"/>
+              </a:schemeClr>
+            </a:gs>
+            <a:gs pos="50000">
+              <a:schemeClr val="phClr">
+                <a:satMod val="110000"/>
+                <a:lumMod val="100000"/>
+                <a:shade val="100000"/>
+              </a:schemeClr>
+            </a:gs>
+            <a:gs pos="100000">
+              <a:schemeClr val="phClr">
+                <a:lumMod val="99000"/>
+                <a:satMod val="120000"/>
+                <a:shade val="78000"/>
+              </a:schemeClr>
+            </a:gs>
+          </a:gsLst>
+          <a:lin ang="5400000" scaled="0"/>
+        </a:gradFill>
+      </a:fillStyleLst>
+      <a:lnStyleLst>
+        <a:ln w="12700" cap="flat" cmpd="sng" algn="ctr">
+          <a:solidFill>
+            <a:schemeClr val="phClr"/>
+          </a:solidFill>
+          <a:prstDash val="solid"/>
+          <a:miter lim="800000"/>
+        </a:ln>
+        <a:ln w="19050" cap="flat" cmpd="sng" algn="ctr">
+          <a:solidFill>
+            <a:schemeClr val="phClr"/>
+          </a:solidFill>
+          <a:prstDash val="solid"/>
+          <a:miter lim="800000"/>
+        </a:ln>
+        <a:ln w="25400" cap="flat" cmpd="sng" algn="ctr">
+          <a:solidFill>
+            <a:schemeClr val="phClr"/>
+          </a:solidFill>
+          <a:prstDash val="solid"/>
+          <a:miter lim="800000"/>
+        </a:ln>
+      </a:lnStyleLst>
+      <a:effectStyleLst>
+        <a:effectStyle>
+          <a:effectLst/>
+        </a:effectStyle>
+        <a:effectStyle>
+          <a:effectLst/>
+        </a:effectStyle>
+        <a:effectStyle>
+          <a:effectLst>
+            <a:outerShdw blurRad="57150" dist="19050" dir="5400000" algn="ctr" rotWithShape="0">
+              <a:srgbClr val="000000">
+                <a:alpha val="63000"/>
+              </a:srgbClr>
+            </a:outerShdw>
+          </a:effectLst>
+        </a:effectStyle>
+      </a:effectStyleLst>
+      <a:bgFillStyleLst>
+        <a:solidFill>
+          <a:schemeClr val="phClr"/>
+        </a:solidFill>
+        <a:solidFill>
+          <a:schemeClr val="phClr">
+            <a:tint val="95000"/>
+            <a:satMod val="170000"/>
+          </a:schemeClr>
+        </a:solidFill>
+        <a:gradFill rotWithShape="1">
+          <a:gsLst>
+            <a:gs pos="0">
+              <a:schemeClr val="phClr">
+                <a:tint val="93000"/>
+                <a:satMod val="150000"/>
+                <a:shade val="98000"/>
+                <a:lumMod val="102000"/>
+              </a:schemeClr>
+            </a:gs>
+            <a:gs pos="50000">
+              <a:schemeClr val="phClr">
+                <a:tint val="98000"/>
+                <a:satMod val="130000"/>
+                <a:shade val="90000"/>
+                <a:lumMod val="103000"/>
+              </a:schemeClr>
+            </a:gs>
+            <a:gs pos="100000">
+              <a:schemeClr val="phClr">
+                <a:shade val="63000"/>
+                <a:satMod val="120000"/>
+              </a:schemeClr>
+            </a:gs>
+          </a:gsLst>
+          <a:lin ang="5400000" scaled="0"/>
+        </a:gradFill>
+      </a:bgFillStyleLst>
+    </a:fmtScheme>
+  </a:themeElements>
+  <a:objectDefaults>
+    <a:lnDef>
+      <a:spPr/>
+      <a:bodyPr/>
+      <a:lstStyle/>
+      <a:style>
+        <a:lnRef idx="2">
+          <a:schemeClr val="accent1"/>
+        </a:lnRef>
+        <a:fillRef idx="0">
+          <a:schemeClr val="accent1"/>
+        </a:fillRef>
+        <a:effectRef idx="1">
+          <a:schemeClr val="accent1"/>
+        </a:effectRef>
+        <a:fontRef idx="minor">
+          <a:schemeClr val="tx1"/>
+        </a:fontRef>
+      </a:style>
+    </a:lnDef>
+  </a:objectDefaults>
+  <a:extraClrSchemeLst/>
+  <a:extLst>
+    <a:ext uri="{05A4C25C-085E-4340-85A3-A5531E510DB2}">
+      <thm15:themeFamily xmlns:thm15="http://schemas.microsoft.com/office/thememl/2012/main" name="Office Theme" id="{2E142A2C-CD16-42D6-873A-C26D2A0506FA}" vid="{1BDDFF52-6CD6-40A5-AB3C-68EB2F1E4D0A}"/>
+    </a:ext>
+  </a:extLst>
+</a:theme>
+</file>
+
+<file path=docMetadata/LabelInfo.xml><?xml version="1.0" encoding="utf-8"?>
+<clbl:labelList xmlns:clbl="http://schemas.microsoft.com/office/2020/mipLabelMetadata">
+  <clbl:label id="{0cf7ac0a-4681-4823-ab0b-04ef02c5f873}" enabled="1" method="Standard" siteId="{42f7676c-f455-423c-82f6-dc2d99791af7}" contentBits="0" removed="0"/>
+</clbl:labelList>
 </file>